--- a/presentations/La_Minute_Copilot_SharePoint.pptx
+++ b/presentations/La_Minute_Copilot_SharePoint.pptx
@@ -3859,7 +3859,7 @@
     <p:bg>
       <p:bgPr>
         <a:solidFill>
-          <a:srgbClr val="0078D4"/>
+          <a:srgbClr val="E6F0EA"/>
         </a:solidFill>
         <a:effectLst/>
       </p:bgPr>
@@ -3873,37 +3873,45 @@
       <p:grpSpPr/>
       <p:sp>
         <p:nvSpPr>
-          <p:cNvPr id="2" name="TextBox 1"/>
-          <p:cNvSpPr txBox="1"/>
+          <p:cNvPr id="2" name="Rectangle 1"/>
+          <p:cNvSpPr/>
           <p:nvPr/>
         </p:nvSpPr>
         <p:spPr>
           <a:xfrm>
-            <a:off x="914400" y="1828800"/>
-            <a:ext cx="10058400" cy="1097280"/>
-          </a:xfrm>
-          <a:prstGeom prst="rect">
-            <a:avLst/>
-          </a:prstGeom>
-          <a:noFill/>
-        </p:spPr>
-        <p:txBody>
-          <a:bodyPr wrap="square">
-            <a:spAutoFit/>
-          </a:bodyPr>
-          <a:lstStyle/>
-          <a:p>
-            <a:pPr algn="ctr">
-              <a:defRPr sz="4800" b="1">
-                <a:solidFill>
-                  <a:srgbClr val="FFFFFF"/>
-                </a:solidFill>
-                <a:latin typeface="Calibri"/>
-              </a:defRPr>
-            </a:pPr>
-            <a:r>
-              <a:t>🤖 La minute Copilot</a:t>
-            </a:r>
+            <a:off x="0" y="0"/>
+            <a:ext cx="6766560" cy="6858000"/>
+          </a:xfrm>
+          <a:prstGeom prst="rect">
+            <a:avLst/>
+          </a:prstGeom>
+          <a:solidFill>
+            <a:srgbClr val="00874E"/>
+          </a:solidFill>
+          <a:ln>
+            <a:noFill/>
+          </a:ln>
+          <a:effectLst/>
+        </p:spPr>
+        <p:style>
+          <a:lnRef idx="1">
+            <a:schemeClr val="accent1"/>
+          </a:lnRef>
+          <a:fillRef idx="3">
+            <a:schemeClr val="accent1"/>
+          </a:fillRef>
+          <a:effectRef idx="2">
+            <a:schemeClr val="accent1"/>
+          </a:effectRef>
+          <a:fontRef idx="minor">
+            <a:schemeClr val="lt1"/>
+          </a:fontRef>
+        </p:style>
+        <p:txBody>
+          <a:bodyPr rtlCol="0" anchor="ctr"/>
+          <a:lstStyle/>
+          <a:p>
+            <a:pPr algn="ctr"/>
           </a:p>
         </p:txBody>
       </p:sp>
@@ -3915,8 +3923,8 @@
         </p:nvSpPr>
         <p:spPr>
           <a:xfrm>
-            <a:off x="914400" y="2926080"/>
-            <a:ext cx="10058400" cy="731520"/>
+            <a:off x="640080" y="1828800"/>
+            <a:ext cx="5669280" cy="1463040"/>
           </a:xfrm>
           <a:prstGeom prst="rect">
             <a:avLst/>
@@ -3924,35 +3932,79 @@
           <a:noFill/>
         </p:spPr>
         <p:txBody>
-          <a:bodyPr wrap="square">
+          <a:bodyPr wrap="square" lIns="45720" rIns="45720" tIns="18288" bIns="18288">
             <a:spAutoFit/>
           </a:bodyPr>
           <a:lstStyle/>
           <a:p>
-            <a:pPr algn="ctr">
-              <a:defRPr sz="2800" b="0">
-                <a:solidFill>
-                  <a:srgbClr val="AAD4F0"/>
-                </a:solidFill>
-                <a:latin typeface="Calibri"/>
-              </a:defRPr>
-            </a:pPr>
-            <a:r>
-              <a:t>🔗 Copilot se connecte à vos données</a:t>
-            </a:r>
-          </a:p>
-        </p:txBody>
-      </p:sp>
-      <p:sp>
-        <p:nvSpPr>
-          <p:cNvPr id="4" name="TextBox 3"/>
+            <a:pPr algn="l">
+              <a:defRPr sz="4400" b="1">
+                <a:solidFill>
+                  <a:srgbClr val="FFFFFF"/>
+                </a:solidFill>
+                <a:latin typeface="Calibri"/>
+              </a:defRPr>
+            </a:pPr>
+            <a:r>
+              <a:t>La minute Copilot</a:t>
+            </a:r>
+          </a:p>
+        </p:txBody>
+      </p:sp>
+      <p:sp>
+        <p:nvSpPr>
+          <p:cNvPr id="4" name="Rectangle 3"/>
+          <p:cNvSpPr/>
+          <p:nvPr/>
+        </p:nvSpPr>
+        <p:spPr>
+          <a:xfrm>
+            <a:off x="640080" y="3246120"/>
+            <a:ext cx="2926080" cy="36576"/>
+          </a:xfrm>
+          <a:prstGeom prst="rect">
+            <a:avLst/>
+          </a:prstGeom>
+          <a:solidFill>
+            <a:srgbClr val="FFFFFF"/>
+          </a:solidFill>
+          <a:ln>
+            <a:noFill/>
+          </a:ln>
+          <a:effectLst/>
+        </p:spPr>
+        <p:style>
+          <a:lnRef idx="1">
+            <a:schemeClr val="accent1"/>
+          </a:lnRef>
+          <a:fillRef idx="3">
+            <a:schemeClr val="accent1"/>
+          </a:fillRef>
+          <a:effectRef idx="2">
+            <a:schemeClr val="accent1"/>
+          </a:effectRef>
+          <a:fontRef idx="minor">
+            <a:schemeClr val="lt1"/>
+          </a:fontRef>
+        </p:style>
+        <p:txBody>
+          <a:bodyPr rtlCol="0" anchor="ctr"/>
+          <a:lstStyle/>
+          <a:p>
+            <a:pPr algn="ctr"/>
+          </a:p>
+        </p:txBody>
+      </p:sp>
+      <p:sp>
+        <p:nvSpPr>
+          <p:cNvPr id="5" name="TextBox 4"/>
           <p:cNvSpPr txBox="1"/>
           <p:nvPr/>
         </p:nvSpPr>
         <p:spPr>
           <a:xfrm>
-            <a:off x="914400" y="4114800"/>
-            <a:ext cx="10058400" cy="548640"/>
+            <a:off x="640080" y="3429000"/>
+            <a:ext cx="5669280" cy="640080"/>
           </a:xfrm>
           <a:prstGeom prst="rect">
             <a:avLst/>
@@ -3960,21 +4012,129 @@
           <a:noFill/>
         </p:spPr>
         <p:txBody>
-          <a:bodyPr wrap="square">
+          <a:bodyPr wrap="square" lIns="45720" rIns="45720" tIns="18288" bIns="18288">
             <a:spAutoFit/>
           </a:bodyPr>
           <a:lstStyle/>
           <a:p>
-            <a:pPr algn="ctr">
-              <a:defRPr sz="1600" b="0">
-                <a:solidFill>
-                  <a:srgbClr val="AAD4F0"/>
+            <a:pPr algn="l">
+              <a:defRPr sz="2200" b="0">
+                <a:solidFill>
+                  <a:srgbClr val="FFFFFF"/>
+                </a:solidFill>
+                <a:latin typeface="Calibri"/>
+              </a:defRPr>
+            </a:pPr>
+            <a:r>
+              <a:t>Copilot se connecte à vos données</a:t>
+            </a:r>
+          </a:p>
+        </p:txBody>
+      </p:sp>
+      <p:sp>
+        <p:nvSpPr>
+          <p:cNvPr id="6" name="TextBox 5"/>
+          <p:cNvSpPr txBox="1"/>
+          <p:nvPr/>
+        </p:nvSpPr>
+        <p:spPr>
+          <a:xfrm>
+            <a:off x="640080" y="4572000"/>
+            <a:ext cx="5669280" cy="365760"/>
+          </a:xfrm>
+          <a:prstGeom prst="rect">
+            <a:avLst/>
+          </a:prstGeom>
+          <a:noFill/>
+        </p:spPr>
+        <p:txBody>
+          <a:bodyPr wrap="square" lIns="45720" rIns="45720" tIns="18288" bIns="18288">
+            <a:spAutoFit/>
+          </a:bodyPr>
+          <a:lstStyle/>
+          <a:p>
+            <a:pPr algn="l">
+              <a:defRPr sz="1300" b="0">
+                <a:solidFill>
+                  <a:srgbClr val="CCE0D2"/>
                 </a:solidFill>
                 <a:latin typeface="Calibri"/>
               </a:defRPr>
             </a:pPr>
             <a:r>
               <a:t>SharePoint · OneDrive · Microsoft Graph · Contexte · Sécurité • IT &amp; non-IT</a:t>
+            </a:r>
+          </a:p>
+        </p:txBody>
+      </p:sp>
+      <p:sp>
+        <p:nvSpPr>
+          <p:cNvPr id="7" name="TextBox 6"/>
+          <p:cNvSpPr txBox="1"/>
+          <p:nvPr/>
+        </p:nvSpPr>
+        <p:spPr>
+          <a:xfrm>
+            <a:off x="640080" y="5029200"/>
+            <a:ext cx="5669280" cy="320040"/>
+          </a:xfrm>
+          <a:prstGeom prst="rect">
+            <a:avLst/>
+          </a:prstGeom>
+          <a:noFill/>
+        </p:spPr>
+        <p:txBody>
+          <a:bodyPr wrap="square" lIns="45720" rIns="45720" tIns="18288" bIns="18288">
+            <a:spAutoFit/>
+          </a:bodyPr>
+          <a:lstStyle/>
+          <a:p>
+            <a:pPr algn="l">
+              <a:defRPr sz="1300" b="1">
+                <a:solidFill>
+                  <a:srgbClr val="FFFFFF"/>
+                </a:solidFill>
+                <a:latin typeface="Calibri"/>
+              </a:defRPr>
+            </a:pPr>
+            <a:r>
+              <a:t>Martin Fournier</a:t>
+            </a:r>
+          </a:p>
+        </p:txBody>
+      </p:sp>
+      <p:sp>
+        <p:nvSpPr>
+          <p:cNvPr id="8" name="TextBox 7"/>
+          <p:cNvSpPr txBox="1"/>
+          <p:nvPr/>
+        </p:nvSpPr>
+        <p:spPr>
+          <a:xfrm>
+            <a:off x="640080" y="5349240"/>
+            <a:ext cx="5669280" cy="274320"/>
+          </a:xfrm>
+          <a:prstGeom prst="rect">
+            <a:avLst/>
+          </a:prstGeom>
+          <a:noFill/>
+        </p:spPr>
+        <p:txBody>
+          <a:bodyPr wrap="square" lIns="45720" rIns="45720" tIns="18288" bIns="18288">
+            <a:spAutoFit/>
+          </a:bodyPr>
+          <a:lstStyle/>
+          <a:p>
+            <a:pPr algn="l">
+              <a:defRPr sz="1200" b="0">
+                <a:solidFill>
+                  <a:srgbClr val="CCE0D2"/>
+                </a:solidFill>
+                <a:latin typeface="Calibri"/>
+              </a:defRPr>
+            </a:pPr>
+            <a:r>
+              <a:t>2026-05-17</a:t>
             </a:r>
           </a:p>
         </p:txBody>
@@ -3993,7 +4153,7 @@
     <p:bg>
       <p:bgPr>
         <a:solidFill>
-          <a:srgbClr val="FFFFFF"/>
+          <a:srgbClr val="E6F0EA"/>
         </a:solidFill>
         <a:effectLst/>
       </p:bgPr>
@@ -4013,8 +4173,8 @@
         </p:nvSpPr>
         <p:spPr>
           <a:xfrm>
-            <a:off x="457200" y="274320"/>
-            <a:ext cx="10972800" cy="640080"/>
+            <a:off x="457200" y="365760"/>
+            <a:ext cx="10972800" cy="731520"/>
           </a:xfrm>
           <a:prstGeom prst="rect">
             <a:avLst/>
@@ -4022,21 +4182,21 @@
           <a:noFill/>
         </p:spPr>
         <p:txBody>
-          <a:bodyPr wrap="square">
+          <a:bodyPr wrap="square" lIns="45720" rIns="45720" tIns="18288" bIns="18288">
             <a:spAutoFit/>
           </a:bodyPr>
           <a:lstStyle/>
           <a:p>
             <a:pPr algn="l">
-              <a:defRPr sz="3200" b="1">
-                <a:solidFill>
-                  <a:srgbClr val="2B2B2B"/>
-                </a:solidFill>
-                <a:latin typeface="Calibri"/>
-              </a:defRPr>
-            </a:pPr>
-            <a:r>
-              <a:t>🔗 Comment Copilot accède à vos données</a:t>
+              <a:defRPr sz="2800" b="1">
+                <a:solidFill>
+                  <a:srgbClr val="006B3F"/>
+                </a:solidFill>
+                <a:latin typeface="Calibri"/>
+              </a:defRPr>
+            </a:pPr>
+            <a:r>
+              <a:t>Comment Copilot accède à vos données</a:t>
             </a:r>
           </a:p>
         </p:txBody>
@@ -4049,8 +4209,8 @@
         </p:nvSpPr>
         <p:spPr>
           <a:xfrm>
-            <a:off x="457200" y="914400"/>
-            <a:ext cx="10972800" cy="457200"/>
+            <a:off x="457200" y="1005840"/>
+            <a:ext cx="10972800" cy="411480"/>
           </a:xfrm>
           <a:prstGeom prst="rect">
             <a:avLst/>
@@ -4058,13 +4218,13 @@
           <a:noFill/>
         </p:spPr>
         <p:txBody>
-          <a:bodyPr wrap="square">
+          <a:bodyPr wrap="square" lIns="45720" rIns="45720" tIns="18288" bIns="18288">
             <a:spAutoFit/>
           </a:bodyPr>
           <a:lstStyle/>
           <a:p>
             <a:pPr algn="l">
-              <a:defRPr sz="1800" b="0">
+              <a:defRPr sz="1500" b="0">
                 <a:solidFill>
                   <a:srgbClr val="6B6B6B"/>
                 </a:solidFill>
@@ -4079,113 +4239,25 @@
       </p:sp>
       <p:sp>
         <p:nvSpPr>
-          <p:cNvPr id="4" name="TextBox 3"/>
-          <p:cNvSpPr txBox="1"/>
-          <p:nvPr/>
-        </p:nvSpPr>
-        <p:spPr>
-          <a:xfrm>
-            <a:off x="457200" y="1554480"/>
-            <a:ext cx="10972800" cy="1371600"/>
-          </a:xfrm>
-          <a:prstGeom prst="rect">
-            <a:avLst/>
-          </a:prstGeom>
-          <a:noFill/>
-        </p:spPr>
-        <p:txBody>
-          <a:bodyPr wrap="square">
-            <a:spAutoFit/>
-          </a:bodyPr>
-          <a:lstStyle/>
-          <a:p>
-            <a:pPr>
-              <a:spcAft>
-                <a:spcPts val="400"/>
-              </a:spcAft>
-              <a:defRPr sz="1400">
-                <a:solidFill>
-                  <a:srgbClr val="2B2B2B"/>
-                </a:solidFill>
-                <a:latin typeface="Calibri"/>
-              </a:defRPr>
-            </a:pPr>
-            <a:r>
-              <a:t>• Copilot utilise Microsoft Graph — l'API qui relie tous les services M365</a:t>
-            </a:r>
-          </a:p>
-          <a:p>
-            <a:pPr>
-              <a:spcAft>
-                <a:spcPts val="400"/>
-              </a:spcAft>
-              <a:defRPr sz="1400">
-                <a:solidFill>
-                  <a:srgbClr val="2B2B2B"/>
-                </a:solidFill>
-                <a:latin typeface="Calibri"/>
-              </a:defRPr>
-            </a:pPr>
-            <a:r>
-              <a:t>• Il peut lire: SharePoint, OneDrive, Teams, Outlook, Calendrier, etc.</a:t>
-            </a:r>
-          </a:p>
-          <a:p>
-            <a:pPr>
-              <a:spcAft>
-                <a:spcPts val="400"/>
-              </a:spcAft>
-              <a:defRPr sz="1400">
-                <a:solidFill>
-                  <a:srgbClr val="2B2B2B"/>
-                </a:solidFill>
-                <a:latin typeface="Calibri"/>
-              </a:defRPr>
-            </a:pPr>
-            <a:r>
-              <a:t>• Respecte vos permissions existantes: il ne voit que vos documents</a:t>
-            </a:r>
-          </a:p>
-          <a:p>
-            <a:pPr>
-              <a:spcAft>
-                <a:spcPts val="400"/>
-              </a:spcAft>
-              <a:defRPr sz="1400">
-                <a:solidFill>
-                  <a:srgbClr val="2B2B2B"/>
-                </a:solidFill>
-                <a:latin typeface="Calibri"/>
-              </a:defRPr>
-            </a:pPr>
-            <a:r>
-              <a:t>• Aucun accès supplémentaire — vos droits d'accès sont la seule limite</a:t>
-            </a:r>
-          </a:p>
-        </p:txBody>
-      </p:sp>
-      <p:sp>
-        <p:nvSpPr>
-          <p:cNvPr id="5" name="Rectangle 4"/>
+          <p:cNvPr id="4" name="Rectangle 3"/>
           <p:cNvSpPr/>
           <p:nvPr/>
         </p:nvSpPr>
         <p:spPr>
           <a:xfrm>
-            <a:off x="457200" y="3017520"/>
-            <a:ext cx="3383280" cy="3657600"/>
+            <a:off x="457200" y="1508760"/>
+            <a:ext cx="11274552" cy="18288"/>
           </a:xfrm>
           <a:prstGeom prst="rect">
             <a:avLst/>
           </a:prstGeom>
           <a:solidFill>
-            <a:srgbClr val="FFFFFF"/>
+            <a:srgbClr val="00874E"/>
           </a:solidFill>
           <a:ln>
-            <a:solidFill>
-              <a:srgbClr val="E0E0E0"/>
-            </a:solidFill>
+            <a:noFill/>
           </a:ln>
+          <a:effectLst/>
         </p:spPr>
         <p:style>
           <a:lnRef idx="1">
@@ -4211,14 +4283,14 @@
       </p:sp>
       <p:sp>
         <p:nvSpPr>
-          <p:cNvPr id="6" name="TextBox 5"/>
+          <p:cNvPr id="5" name="TextBox 4"/>
           <p:cNvSpPr txBox="1"/>
           <p:nvPr/>
         </p:nvSpPr>
         <p:spPr>
           <a:xfrm>
-            <a:off x="731520" y="3200400"/>
-            <a:ext cx="2834640" cy="457200"/>
+            <a:off x="457200" y="1737360"/>
+            <a:ext cx="10972800" cy="1188720"/>
           </a:xfrm>
           <a:prstGeom prst="rect">
             <a:avLst/>
@@ -4231,175 +4303,81 @@
           </a:bodyPr>
           <a:lstStyle/>
           <a:p>
-            <a:pPr algn="l">
-              <a:defRPr sz="1800" b="1">
-                <a:solidFill>
-                  <a:srgbClr val="0078D4"/>
-                </a:solidFill>
-                <a:latin typeface="Calibri"/>
-              </a:defRPr>
-            </a:pPr>
-            <a:r>
-              <a:t>📁 OneDrive</a:t>
-            </a:r>
-          </a:p>
-        </p:txBody>
-      </p:sp>
-      <p:sp>
-        <p:nvSpPr>
-          <p:cNvPr id="7" name="TextBox 6"/>
-          <p:cNvSpPr txBox="1"/>
-          <p:nvPr/>
-        </p:nvSpPr>
-        <p:spPr>
-          <a:xfrm>
-            <a:off x="731520" y="3657600"/>
-            <a:ext cx="2834640" cy="2743200"/>
-          </a:xfrm>
-          <a:prstGeom prst="rect">
-            <a:avLst/>
-          </a:prstGeom>
-          <a:noFill/>
-        </p:spPr>
-        <p:txBody>
-          <a:bodyPr wrap="square">
-            <a:spAutoFit/>
-          </a:bodyPr>
-          <a:lstStyle/>
-          <a:p>
-            <a:pPr>
-              <a:spcAft>
-                <a:spcPts val="400"/>
-              </a:spcAft>
-              <a:defRPr sz="1300">
-                <a:solidFill>
-                  <a:srgbClr val="2B2B2B"/>
-                </a:solidFill>
-                <a:latin typeface="Calibri"/>
-              </a:defRPr>
-            </a:pPr>
-            <a:r>
-              <a:t>Vos fichiers personnels</a:t>
-            </a:r>
-          </a:p>
-          <a:p>
-            <a:pPr>
-              <a:spcAft>
-                <a:spcPts val="400"/>
-              </a:spcAft>
-              <a:defRPr sz="1300">
-                <a:solidFill>
-                  <a:srgbClr val="2B2B2B"/>
-                </a:solidFill>
-                <a:latin typeface="Calibri"/>
-              </a:defRPr>
-            </a:pPr>
-          </a:p>
-          <a:p>
-            <a:pPr>
-              <a:spcAft>
-                <a:spcPts val="400"/>
-              </a:spcAft>
-              <a:defRPr sz="1300">
-                <a:solidFill>
-                  <a:srgbClr val="2B2B2B"/>
-                </a:solidFill>
-                <a:latin typeface="Calibri"/>
-              </a:defRPr>
-            </a:pPr>
-            <a:r>
-              <a:t>Documents Word, Excel,</a:t>
-            </a:r>
-          </a:p>
-          <a:p>
-            <a:pPr>
-              <a:spcAft>
-                <a:spcPts val="400"/>
-              </a:spcAft>
-              <a:defRPr sz="1300">
-                <a:solidFill>
-                  <a:srgbClr val="2B2B2B"/>
-                </a:solidFill>
-                <a:latin typeface="Calibri"/>
-              </a:defRPr>
-            </a:pPr>
-            <a:r>
-              <a:t>PowerPoint, PDF...</a:t>
-            </a:r>
-          </a:p>
-          <a:p>
-            <a:pPr>
-              <a:spcAft>
-                <a:spcPts val="400"/>
-              </a:spcAft>
-              <a:defRPr sz="1300">
-                <a:solidFill>
-                  <a:srgbClr val="2B2B2B"/>
-                </a:solidFill>
-                <a:latin typeface="Calibri"/>
-              </a:defRPr>
-            </a:pPr>
-          </a:p>
-          <a:p>
-            <a:pPr>
-              <a:spcAft>
-                <a:spcPts val="400"/>
-              </a:spcAft>
-              <a:defRPr sz="1300">
-                <a:solidFill>
-                  <a:srgbClr val="2B2B2B"/>
-                </a:solidFill>
-                <a:latin typeface="Calibri"/>
-              </a:defRPr>
-            </a:pPr>
-            <a:r>
-              <a:t>✅ Accessibles si</a:t>
-            </a:r>
-          </a:p>
-          <a:p>
-            <a:pPr>
-              <a:spcAft>
-                <a:spcPts val="400"/>
-              </a:spcAft>
-              <a:defRPr sz="1300">
-                <a:solidFill>
-                  <a:srgbClr val="2B2B2B"/>
-                </a:solidFill>
-                <a:latin typeface="Calibri"/>
-              </a:defRPr>
-            </a:pPr>
-            <a:r>
-              <a:t>   vous êtes le</a:t>
-            </a:r>
-          </a:p>
-          <a:p>
-            <a:pPr>
-              <a:spcAft>
-                <a:spcPts val="400"/>
-              </a:spcAft>
-              <a:defRPr sz="1300">
-                <a:solidFill>
-                  <a:srgbClr val="2B2B2B"/>
-                </a:solidFill>
-                <a:latin typeface="Calibri"/>
-              </a:defRPr>
-            </a:pPr>
-            <a:r>
-              <a:t>   propriétaire</a:t>
-            </a:r>
-          </a:p>
-        </p:txBody>
-      </p:sp>
-      <p:sp>
-        <p:nvSpPr>
-          <p:cNvPr id="8" name="Rectangle 7"/>
+            <a:pPr>
+              <a:spcAft>
+                <a:spcPts val="400"/>
+              </a:spcAft>
+              <a:defRPr sz="1400">
+                <a:solidFill>
+                  <a:srgbClr val="2B2B2B"/>
+                </a:solidFill>
+                <a:latin typeface="Calibri"/>
+              </a:defRPr>
+            </a:pPr>
+            <a:r>
+              <a:t>• Copilot utilise Microsoft Graph — l'API qui relie tous les services M365</a:t>
+            </a:r>
+          </a:p>
+          <a:p>
+            <a:pPr>
+              <a:spcAft>
+                <a:spcPts val="400"/>
+              </a:spcAft>
+              <a:defRPr sz="1400">
+                <a:solidFill>
+                  <a:srgbClr val="2B2B2B"/>
+                </a:solidFill>
+                <a:latin typeface="Calibri"/>
+              </a:defRPr>
+            </a:pPr>
+            <a:r>
+              <a:t>• Il peut lire: SharePoint, OneDrive, Teams, Outlook, Calendrier, etc.</a:t>
+            </a:r>
+          </a:p>
+          <a:p>
+            <a:pPr>
+              <a:spcAft>
+                <a:spcPts val="400"/>
+              </a:spcAft>
+              <a:defRPr sz="1400">
+                <a:solidFill>
+                  <a:srgbClr val="2B2B2B"/>
+                </a:solidFill>
+                <a:latin typeface="Calibri"/>
+              </a:defRPr>
+            </a:pPr>
+            <a:r>
+              <a:t>• Respecte vos permissions existantes: il ne voit que vos documents</a:t>
+            </a:r>
+          </a:p>
+          <a:p>
+            <a:pPr>
+              <a:spcAft>
+                <a:spcPts val="400"/>
+              </a:spcAft>
+              <a:defRPr sz="1400">
+                <a:solidFill>
+                  <a:srgbClr val="2B2B2B"/>
+                </a:solidFill>
+                <a:latin typeface="Calibri"/>
+              </a:defRPr>
+            </a:pPr>
+            <a:r>
+              <a:t>• Aucun accès supplémentaire — vos droits d'accès sont la seule limite</a:t>
+            </a:r>
+          </a:p>
+        </p:txBody>
+      </p:sp>
+      <p:sp>
+        <p:nvSpPr>
+          <p:cNvPr id="6" name="Rectangle 5"/>
           <p:cNvSpPr/>
           <p:nvPr/>
         </p:nvSpPr>
         <p:spPr>
           <a:xfrm>
-            <a:off x="4114800" y="3017520"/>
-            <a:ext cx="3383280" cy="3657600"/>
+            <a:off x="457200" y="2926080"/>
+            <a:ext cx="3383280" cy="3291840"/>
           </a:xfrm>
           <a:prstGeom prst="rect">
             <a:avLst/>
@@ -4412,6 +4390,7 @@
               <a:srgbClr val="E0E0E0"/>
             </a:solidFill>
           </a:ln>
+          <a:effectLst/>
         </p:spPr>
         <p:style>
           <a:lnRef idx="1">
@@ -4435,6 +4414,66 @@
           </a:p>
         </p:txBody>
       </p:sp>
+      <p:pic>
+        <p:nvPicPr>
+          <p:cNvPr id="7" name="Picture 6" descr="cloud_00874E_30.png"/>
+          <p:cNvPicPr>
+            <a:picLocks noChangeAspect="1"/>
+          </p:cNvPicPr>
+          <p:nvPr/>
+        </p:nvPicPr>
+        <p:blipFill>
+          <a:blip r:embed="rId3"/>
+          <a:stretch>
+            <a:fillRect/>
+          </a:stretch>
+        </p:blipFill>
+        <p:spPr>
+          <a:xfrm>
+            <a:off x="713232" y="3090672"/>
+            <a:ext cx="292608" cy="292608"/>
+          </a:xfrm>
+          <a:prstGeom prst="rect">
+            <a:avLst/>
+          </a:prstGeom>
+        </p:spPr>
+      </p:pic>
+      <p:sp>
+        <p:nvSpPr>
+          <p:cNvPr id="8" name="TextBox 7"/>
+          <p:cNvSpPr txBox="1"/>
+          <p:nvPr/>
+        </p:nvSpPr>
+        <p:spPr>
+          <a:xfrm>
+            <a:off x="1115568" y="3108960"/>
+            <a:ext cx="2542032" cy="457200"/>
+          </a:xfrm>
+          <a:prstGeom prst="rect">
+            <a:avLst/>
+          </a:prstGeom>
+          <a:noFill/>
+        </p:spPr>
+        <p:txBody>
+          <a:bodyPr wrap="square" lIns="45720" rIns="45720" tIns="18288" bIns="18288">
+            <a:spAutoFit/>
+          </a:bodyPr>
+          <a:lstStyle/>
+          <a:p>
+            <a:pPr algn="l">
+              <a:defRPr sz="1700" b="1">
+                <a:solidFill>
+                  <a:srgbClr val="00874E"/>
+                </a:solidFill>
+                <a:latin typeface="Calibri"/>
+              </a:defRPr>
+            </a:pPr>
+            <a:r>
+              <a:t>OneDrive</a:t>
+            </a:r>
+          </a:p>
+        </p:txBody>
+      </p:sp>
       <p:sp>
         <p:nvSpPr>
           <p:cNvPr id="9" name="TextBox 8"/>
@@ -4443,8 +4482,8 @@
         </p:nvSpPr>
         <p:spPr>
           <a:xfrm>
-            <a:off x="4389120" y="3200400"/>
-            <a:ext cx="2834640" cy="457200"/>
+            <a:off x="731520" y="3703320"/>
+            <a:ext cx="2834640" cy="2331720"/>
           </a:xfrm>
           <a:prstGeom prst="rect">
             <a:avLst/>
@@ -4457,42 +4496,6 @@
           </a:bodyPr>
           <a:lstStyle/>
           <a:p>
-            <a:pPr algn="l">
-              <a:defRPr sz="1800" b="1">
-                <a:solidFill>
-                  <a:srgbClr val="10B981"/>
-                </a:solidFill>
-                <a:latin typeface="Calibri"/>
-              </a:defRPr>
-            </a:pPr>
-            <a:r>
-              <a:t>🏢 SharePoint</a:t>
-            </a:r>
-          </a:p>
-        </p:txBody>
-      </p:sp>
-      <p:sp>
-        <p:nvSpPr>
-          <p:cNvPr id="10" name="TextBox 9"/>
-          <p:cNvSpPr txBox="1"/>
-          <p:nvPr/>
-        </p:nvSpPr>
-        <p:spPr>
-          <a:xfrm>
-            <a:off x="4389120" y="3657600"/>
-            <a:ext cx="2834640" cy="2743200"/>
-          </a:xfrm>
-          <a:prstGeom prst="rect">
-            <a:avLst/>
-          </a:prstGeom>
-          <a:noFill/>
-        </p:spPr>
-        <p:txBody>
-          <a:bodyPr wrap="square">
-            <a:spAutoFit/>
-          </a:bodyPr>
-          <a:lstStyle/>
-          <a:p>
             <a:pPr>
               <a:spcAft>
                 <a:spcPts val="400"/>
@@ -4505,7 +4508,7 @@
               </a:defRPr>
             </a:pPr>
             <a:r>
-              <a:t>Sites d'équipe</a:t>
+              <a:t>Vos fichiers personnels</a:t>
             </a:r>
           </a:p>
           <a:p>
@@ -4520,9 +4523,6 @@
                 <a:latin typeface="Calibri"/>
               </a:defRPr>
             </a:pPr>
-            <a:r>
-              <a:t>et de département</a:t>
-            </a:r>
           </a:p>
           <a:p>
             <a:pPr>
@@ -4536,6 +4536,9 @@
                 <a:latin typeface="Calibri"/>
               </a:defRPr>
             </a:pPr>
+            <a:r>
+              <a:t>Documents Word, Excel,</a:t>
+            </a:r>
           </a:p>
           <a:p>
             <a:pPr>
@@ -4550,7 +4553,7 @@
               </a:defRPr>
             </a:pPr>
             <a:r>
-              <a:t>Procédures, politiques,</a:t>
+              <a:t>PowerPoint, PDF...</a:t>
             </a:r>
           </a:p>
           <a:p>
@@ -4565,9 +4568,6 @@
                 <a:latin typeface="Calibri"/>
               </a:defRPr>
             </a:pPr>
-            <a:r>
-              <a:t>bibliothèques partagées</a:t>
-            </a:r>
           </a:p>
           <a:p>
             <a:pPr>
@@ -4581,6 +4581,9 @@
                 <a:latin typeface="Calibri"/>
               </a:defRPr>
             </a:pPr>
+            <a:r>
+              <a:t>Accessibles si</a:t>
+            </a:r>
           </a:p>
           <a:p>
             <a:pPr>
@@ -4595,7 +4598,7 @@
               </a:defRPr>
             </a:pPr>
             <a:r>
-              <a:t>✅ Accessibles selon</a:t>
+              <a:t>vous êtes le</a:t>
             </a:r>
           </a:p>
           <a:p>
@@ -4611,21 +4614,21 @@
               </a:defRPr>
             </a:pPr>
             <a:r>
-              <a:t>   vos permissions</a:t>
-            </a:r>
-          </a:p>
-        </p:txBody>
-      </p:sp>
-      <p:sp>
-        <p:nvSpPr>
-          <p:cNvPr id="11" name="Rectangle 10"/>
+              <a:t>propriétaire</a:t>
+            </a:r>
+          </a:p>
+        </p:txBody>
+      </p:sp>
+      <p:sp>
+        <p:nvSpPr>
+          <p:cNvPr id="10" name="Rectangle 9"/>
           <p:cNvSpPr/>
           <p:nvPr/>
         </p:nvSpPr>
         <p:spPr>
           <a:xfrm>
-            <a:off x="7772400" y="3017520"/>
-            <a:ext cx="3383280" cy="3657600"/>
+            <a:off x="4114800" y="2926080"/>
+            <a:ext cx="3383280" cy="3291840"/>
           </a:xfrm>
           <a:prstGeom prst="rect">
             <a:avLst/>
@@ -4638,6 +4641,7 @@
               <a:srgbClr val="E0E0E0"/>
             </a:solidFill>
           </a:ln>
+          <a:effectLst/>
         </p:spPr>
         <p:style>
           <a:lnRef idx="1">
@@ -4661,6 +4665,30 @@
           </a:p>
         </p:txBody>
       </p:sp>
+      <p:pic>
+        <p:nvPicPr>
+          <p:cNvPr id="11" name="Picture 10" descr="building-2_00874E_30.png"/>
+          <p:cNvPicPr>
+            <a:picLocks noChangeAspect="1"/>
+          </p:cNvPicPr>
+          <p:nvPr/>
+        </p:nvPicPr>
+        <p:blipFill>
+          <a:blip r:embed="rId4"/>
+          <a:stretch>
+            <a:fillRect/>
+          </a:stretch>
+        </p:blipFill>
+        <p:spPr>
+          <a:xfrm>
+            <a:off x="4370832" y="3090672"/>
+            <a:ext cx="292608" cy="292608"/>
+          </a:xfrm>
+          <a:prstGeom prst="rect">
+            <a:avLst/>
+          </a:prstGeom>
+        </p:spPr>
+      </p:pic>
       <p:sp>
         <p:nvSpPr>
           <p:cNvPr id="12" name="TextBox 11"/>
@@ -4669,8 +4697,44 @@
         </p:nvSpPr>
         <p:spPr>
           <a:xfrm>
-            <a:off x="8046720" y="3200400"/>
-            <a:ext cx="2834640" cy="457200"/>
+            <a:off x="4773168" y="3108960"/>
+            <a:ext cx="2542031" cy="457200"/>
+          </a:xfrm>
+          <a:prstGeom prst="rect">
+            <a:avLst/>
+          </a:prstGeom>
+          <a:noFill/>
+        </p:spPr>
+        <p:txBody>
+          <a:bodyPr wrap="square" lIns="45720" rIns="45720" tIns="18288" bIns="18288">
+            <a:spAutoFit/>
+          </a:bodyPr>
+          <a:lstStyle/>
+          <a:p>
+            <a:pPr algn="l">
+              <a:defRPr sz="1700" b="1">
+                <a:solidFill>
+                  <a:srgbClr val="00874E"/>
+                </a:solidFill>
+                <a:latin typeface="Calibri"/>
+              </a:defRPr>
+            </a:pPr>
+            <a:r>
+              <a:t>SharePoint</a:t>
+            </a:r>
+          </a:p>
+        </p:txBody>
+      </p:sp>
+      <p:sp>
+        <p:nvSpPr>
+          <p:cNvPr id="13" name="TextBox 12"/>
+          <p:cNvSpPr txBox="1"/>
+          <p:nvPr/>
+        </p:nvSpPr>
+        <p:spPr>
+          <a:xfrm>
+            <a:off x="4389120" y="3703320"/>
+            <a:ext cx="2834640" cy="2331720"/>
           </a:xfrm>
           <a:prstGeom prst="rect">
             <a:avLst/>
@@ -4683,30 +4747,245 @@
           </a:bodyPr>
           <a:lstStyle/>
           <a:p>
-            <a:pPr algn="l">
-              <a:defRPr sz="1800" b="1">
-                <a:solidFill>
-                  <a:srgbClr val="F59E0B"/>
-                </a:solidFill>
-                <a:latin typeface="Calibri"/>
-              </a:defRPr>
-            </a:pPr>
-            <a:r>
-              <a:t>🔐 Sécurité</a:t>
-            </a:r>
-          </a:p>
-        </p:txBody>
-      </p:sp>
-      <p:sp>
-        <p:nvSpPr>
-          <p:cNvPr id="13" name="TextBox 12"/>
+            <a:pPr>
+              <a:spcAft>
+                <a:spcPts val="400"/>
+              </a:spcAft>
+              <a:defRPr sz="1300">
+                <a:solidFill>
+                  <a:srgbClr val="2B2B2B"/>
+                </a:solidFill>
+                <a:latin typeface="Calibri"/>
+              </a:defRPr>
+            </a:pPr>
+            <a:r>
+              <a:t>Sites d'équipe</a:t>
+            </a:r>
+          </a:p>
+          <a:p>
+            <a:pPr>
+              <a:spcAft>
+                <a:spcPts val="400"/>
+              </a:spcAft>
+              <a:defRPr sz="1300">
+                <a:solidFill>
+                  <a:srgbClr val="2B2B2B"/>
+                </a:solidFill>
+                <a:latin typeface="Calibri"/>
+              </a:defRPr>
+            </a:pPr>
+            <a:r>
+              <a:t>et de département</a:t>
+            </a:r>
+          </a:p>
+          <a:p>
+            <a:pPr>
+              <a:spcAft>
+                <a:spcPts val="400"/>
+              </a:spcAft>
+              <a:defRPr sz="1300">
+                <a:solidFill>
+                  <a:srgbClr val="2B2B2B"/>
+                </a:solidFill>
+                <a:latin typeface="Calibri"/>
+              </a:defRPr>
+            </a:pPr>
+          </a:p>
+          <a:p>
+            <a:pPr>
+              <a:spcAft>
+                <a:spcPts val="400"/>
+              </a:spcAft>
+              <a:defRPr sz="1300">
+                <a:solidFill>
+                  <a:srgbClr val="2B2B2B"/>
+                </a:solidFill>
+                <a:latin typeface="Calibri"/>
+              </a:defRPr>
+            </a:pPr>
+            <a:r>
+              <a:t>Procédures, politiques,</a:t>
+            </a:r>
+          </a:p>
+          <a:p>
+            <a:pPr>
+              <a:spcAft>
+                <a:spcPts val="400"/>
+              </a:spcAft>
+              <a:defRPr sz="1300">
+                <a:solidFill>
+                  <a:srgbClr val="2B2B2B"/>
+                </a:solidFill>
+                <a:latin typeface="Calibri"/>
+              </a:defRPr>
+            </a:pPr>
+            <a:r>
+              <a:t>bibliothèques partagées</a:t>
+            </a:r>
+          </a:p>
+          <a:p>
+            <a:pPr>
+              <a:spcAft>
+                <a:spcPts val="400"/>
+              </a:spcAft>
+              <a:defRPr sz="1300">
+                <a:solidFill>
+                  <a:srgbClr val="2B2B2B"/>
+                </a:solidFill>
+                <a:latin typeface="Calibri"/>
+              </a:defRPr>
+            </a:pPr>
+          </a:p>
+          <a:p>
+            <a:pPr>
+              <a:spcAft>
+                <a:spcPts val="400"/>
+              </a:spcAft>
+              <a:defRPr sz="1300">
+                <a:solidFill>
+                  <a:srgbClr val="2B2B2B"/>
+                </a:solidFill>
+                <a:latin typeface="Calibri"/>
+              </a:defRPr>
+            </a:pPr>
+            <a:r>
+              <a:t>Accessibles selon</a:t>
+            </a:r>
+          </a:p>
+          <a:p>
+            <a:pPr>
+              <a:spcAft>
+                <a:spcPts val="400"/>
+              </a:spcAft>
+              <a:defRPr sz="1300">
+                <a:solidFill>
+                  <a:srgbClr val="2B2B2B"/>
+                </a:solidFill>
+                <a:latin typeface="Calibri"/>
+              </a:defRPr>
+            </a:pPr>
+            <a:r>
+              <a:t>vos permissions</a:t>
+            </a:r>
+          </a:p>
+        </p:txBody>
+      </p:sp>
+      <p:sp>
+        <p:nvSpPr>
+          <p:cNvPr id="14" name="Rectangle 13"/>
+          <p:cNvSpPr/>
+          <p:nvPr/>
+        </p:nvSpPr>
+        <p:spPr>
+          <a:xfrm>
+            <a:off x="7772400" y="2926080"/>
+            <a:ext cx="3383280" cy="3291840"/>
+          </a:xfrm>
+          <a:prstGeom prst="rect">
+            <a:avLst/>
+          </a:prstGeom>
+          <a:solidFill>
+            <a:srgbClr val="FFFFFF"/>
+          </a:solidFill>
+          <a:ln>
+            <a:solidFill>
+              <a:srgbClr val="E0E0E0"/>
+            </a:solidFill>
+          </a:ln>
+          <a:effectLst/>
+        </p:spPr>
+        <p:style>
+          <a:lnRef idx="1">
+            <a:schemeClr val="accent1"/>
+          </a:lnRef>
+          <a:fillRef idx="3">
+            <a:schemeClr val="accent1"/>
+          </a:fillRef>
+          <a:effectRef idx="2">
+            <a:schemeClr val="accent1"/>
+          </a:effectRef>
+          <a:fontRef idx="minor">
+            <a:schemeClr val="lt1"/>
+          </a:fontRef>
+        </p:style>
+        <p:txBody>
+          <a:bodyPr rtlCol="0" anchor="ctr"/>
+          <a:lstStyle/>
+          <a:p>
+            <a:pPr algn="ctr"/>
+          </a:p>
+        </p:txBody>
+      </p:sp>
+      <p:pic>
+        <p:nvPicPr>
+          <p:cNvPr id="15" name="Picture 14" descr="lock-keyhole_F59E0B_30.png"/>
+          <p:cNvPicPr>
+            <a:picLocks noChangeAspect="1"/>
+          </p:cNvPicPr>
+          <p:nvPr/>
+        </p:nvPicPr>
+        <p:blipFill>
+          <a:blip r:embed="rId5"/>
+          <a:stretch>
+            <a:fillRect/>
+          </a:stretch>
+        </p:blipFill>
+        <p:spPr>
+          <a:xfrm>
+            <a:off x="8028431" y="3090672"/>
+            <a:ext cx="292608" cy="292608"/>
+          </a:xfrm>
+          <a:prstGeom prst="rect">
+            <a:avLst/>
+          </a:prstGeom>
+        </p:spPr>
+      </p:pic>
+      <p:sp>
+        <p:nvSpPr>
+          <p:cNvPr id="16" name="TextBox 15"/>
           <p:cNvSpPr txBox="1"/>
           <p:nvPr/>
         </p:nvSpPr>
         <p:spPr>
           <a:xfrm>
-            <a:off x="8046720" y="3657600"/>
-            <a:ext cx="2834640" cy="2743200"/>
+            <a:off x="8430767" y="3108960"/>
+            <a:ext cx="2542032" cy="457200"/>
+          </a:xfrm>
+          <a:prstGeom prst="rect">
+            <a:avLst/>
+          </a:prstGeom>
+          <a:noFill/>
+        </p:spPr>
+        <p:txBody>
+          <a:bodyPr wrap="square" lIns="45720" rIns="45720" tIns="18288" bIns="18288">
+            <a:spAutoFit/>
+          </a:bodyPr>
+          <a:lstStyle/>
+          <a:p>
+            <a:pPr algn="l">
+              <a:defRPr sz="1700" b="1">
+                <a:solidFill>
+                  <a:srgbClr val="F59E0B"/>
+                </a:solidFill>
+                <a:latin typeface="Calibri"/>
+              </a:defRPr>
+            </a:pPr>
+            <a:r>
+              <a:t>Sécurité</a:t>
+            </a:r>
+          </a:p>
+        </p:txBody>
+      </p:sp>
+      <p:sp>
+        <p:nvSpPr>
+          <p:cNvPr id="17" name="TextBox 16"/>
+          <p:cNvSpPr txBox="1"/>
+          <p:nvPr/>
+        </p:nvSpPr>
+        <p:spPr>
+          <a:xfrm>
+            <a:off x="8046720" y="3703320"/>
+            <a:ext cx="2834640" cy="2331720"/>
           </a:xfrm>
           <a:prstGeom prst="rect">
             <a:avLst/>
@@ -4837,7 +5116,7 @@
               </a:defRPr>
             </a:pPr>
             <a:r>
-              <a:t>✅ Conforme aux</a:t>
+              <a:t>Conforme aux</a:t>
             </a:r>
           </a:p>
           <a:p>
@@ -4853,7 +5132,123 @@
               </a:defRPr>
             </a:pPr>
             <a:r>
-              <a:t>   règles IT</a:t>
+              <a:t>règles IT</a:t>
+            </a:r>
+          </a:p>
+        </p:txBody>
+      </p:sp>
+      <p:sp>
+        <p:nvSpPr>
+          <p:cNvPr id="18" name="Rectangle 17"/>
+          <p:cNvSpPr/>
+          <p:nvPr/>
+        </p:nvSpPr>
+        <p:spPr>
+          <a:xfrm>
+            <a:off x="457200" y="6446520"/>
+            <a:ext cx="11274552" cy="13716"/>
+          </a:xfrm>
+          <a:prstGeom prst="rect">
+            <a:avLst/>
+          </a:prstGeom>
+          <a:solidFill>
+            <a:srgbClr val="00874E"/>
+          </a:solidFill>
+          <a:ln>
+            <a:noFill/>
+          </a:ln>
+          <a:effectLst/>
+        </p:spPr>
+        <p:style>
+          <a:lnRef idx="1">
+            <a:schemeClr val="accent1"/>
+          </a:lnRef>
+          <a:fillRef idx="3">
+            <a:schemeClr val="accent1"/>
+          </a:fillRef>
+          <a:effectRef idx="2">
+            <a:schemeClr val="accent1"/>
+          </a:effectRef>
+          <a:fontRef idx="minor">
+            <a:schemeClr val="lt1"/>
+          </a:fontRef>
+        </p:style>
+        <p:txBody>
+          <a:bodyPr rtlCol="0" anchor="ctr"/>
+          <a:lstStyle/>
+          <a:p>
+            <a:pPr algn="ctr"/>
+          </a:p>
+        </p:txBody>
+      </p:sp>
+      <p:sp>
+        <p:nvSpPr>
+          <p:cNvPr id="19" name="TextBox 18"/>
+          <p:cNvSpPr txBox="1"/>
+          <p:nvPr/>
+        </p:nvSpPr>
+        <p:spPr>
+          <a:xfrm>
+            <a:off x="457200" y="6537960"/>
+            <a:ext cx="5486400" cy="274320"/>
+          </a:xfrm>
+          <a:prstGeom prst="rect">
+            <a:avLst/>
+          </a:prstGeom>
+          <a:noFill/>
+        </p:spPr>
+        <p:txBody>
+          <a:bodyPr wrap="square" lIns="45720" rIns="45720" tIns="18288" bIns="18288">
+            <a:spAutoFit/>
+          </a:bodyPr>
+          <a:lstStyle/>
+          <a:p>
+            <a:pPr algn="l">
+              <a:defRPr sz="1000" b="0">
+                <a:solidFill>
+                  <a:srgbClr val="6B6B6B"/>
+                </a:solidFill>
+                <a:latin typeface="Calibri"/>
+              </a:defRPr>
+            </a:pPr>
+            <a:r>
+              <a:t>La minute Copilot</a:t>
+            </a:r>
+          </a:p>
+        </p:txBody>
+      </p:sp>
+      <p:sp>
+        <p:nvSpPr>
+          <p:cNvPr id="20" name="TextBox 19"/>
+          <p:cNvSpPr txBox="1"/>
+          <p:nvPr/>
+        </p:nvSpPr>
+        <p:spPr>
+          <a:xfrm>
+            <a:off x="10972800" y="6537960"/>
+            <a:ext cx="822960" cy="274320"/>
+          </a:xfrm>
+          <a:prstGeom prst="rect">
+            <a:avLst/>
+          </a:prstGeom>
+          <a:noFill/>
+        </p:spPr>
+        <p:txBody>
+          <a:bodyPr wrap="square" lIns="45720" rIns="45720" tIns="18288" bIns="18288">
+            <a:spAutoFit/>
+          </a:bodyPr>
+          <a:lstStyle/>
+          <a:p>
+            <a:pPr algn="r">
+              <a:defRPr sz="1000" b="0">
+                <a:solidFill>
+                  <a:srgbClr val="6B6B6B"/>
+                </a:solidFill>
+                <a:latin typeface="Calibri"/>
+              </a:defRPr>
+            </a:pPr>
+            <a:r>
+              <a:t>2</a:t>
             </a:r>
           </a:p>
         </p:txBody>
@@ -4872,7 +5267,7 @@
     <p:bg>
       <p:bgPr>
         <a:solidFill>
-          <a:srgbClr val="FFFFFF"/>
+          <a:srgbClr val="E6F0EA"/>
         </a:solidFill>
         <a:effectLst/>
       </p:bgPr>
@@ -4892,8 +5287,8 @@
         </p:nvSpPr>
         <p:spPr>
           <a:xfrm>
-            <a:off x="457200" y="274320"/>
-            <a:ext cx="10972800" cy="640080"/>
+            <a:off x="457200" y="365760"/>
+            <a:ext cx="10972800" cy="731520"/>
           </a:xfrm>
           <a:prstGeom prst="rect">
             <a:avLst/>
@@ -4901,21 +5296,21 @@
           <a:noFill/>
         </p:spPr>
         <p:txBody>
-          <a:bodyPr wrap="square">
+          <a:bodyPr wrap="square" lIns="45720" rIns="45720" tIns="18288" bIns="18288">
             <a:spAutoFit/>
           </a:bodyPr>
           <a:lstStyle/>
           <a:p>
             <a:pPr algn="l">
-              <a:defRPr sz="3200" b="1">
-                <a:solidFill>
-                  <a:srgbClr val="2B2B2B"/>
-                </a:solidFill>
-                <a:latin typeface="Calibri"/>
-              </a:defRPr>
-            </a:pPr>
-            <a:r>
-              <a:t>💡 Pourquoi c'est puissant pour vous</a:t>
+              <a:defRPr sz="2800" b="1">
+                <a:solidFill>
+                  <a:srgbClr val="006B3F"/>
+                </a:solidFill>
+                <a:latin typeface="Calibri"/>
+              </a:defRPr>
+            </a:pPr>
+            <a:r>
+              <a:t>Pourquoi c'est puissant pour vous</a:t>
             </a:r>
           </a:p>
         </p:txBody>
@@ -4928,8 +5323,8 @@
         </p:nvSpPr>
         <p:spPr>
           <a:xfrm>
-            <a:off x="457200" y="914400"/>
-            <a:ext cx="10972800" cy="457200"/>
+            <a:off x="457200" y="1005840"/>
+            <a:ext cx="10972800" cy="411480"/>
           </a:xfrm>
           <a:prstGeom prst="rect">
             <a:avLst/>
@@ -4937,13 +5332,13 @@
           <a:noFill/>
         </p:spPr>
         <p:txBody>
-          <a:bodyPr wrap="square">
+          <a:bodyPr wrap="square" lIns="45720" rIns="45720" tIns="18288" bIns="18288">
             <a:spAutoFit/>
           </a:bodyPr>
           <a:lstStyle/>
           <a:p>
             <a:pPr algn="l">
-              <a:defRPr sz="1800" b="0">
+              <a:defRPr sz="1500" b="0">
                 <a:solidFill>
                   <a:srgbClr val="6B6B6B"/>
                 </a:solidFill>
@@ -4958,97 +5353,25 @@
       </p:sp>
       <p:sp>
         <p:nvSpPr>
-          <p:cNvPr id="4" name="TextBox 3"/>
-          <p:cNvSpPr txBox="1"/>
-          <p:nvPr/>
-        </p:nvSpPr>
-        <p:spPr>
-          <a:xfrm>
-            <a:off x="457200" y="1554480"/>
-            <a:ext cx="10972800" cy="1371600"/>
-          </a:xfrm>
-          <a:prstGeom prst="rect">
-            <a:avLst/>
-          </a:prstGeom>
-          <a:noFill/>
-        </p:spPr>
-        <p:txBody>
-          <a:bodyPr wrap="square">
-            <a:spAutoFit/>
-          </a:bodyPr>
-          <a:lstStyle/>
-          <a:p>
-            <a:pPr>
-              <a:spcAft>
-                <a:spcPts val="400"/>
-              </a:spcAft>
-              <a:defRPr sz="1400">
-                <a:solidFill>
-                  <a:srgbClr val="2B2B2B"/>
-                </a:solidFill>
-                <a:latin typeface="Calibri"/>
-              </a:defRPr>
-            </a:pPr>
-            <a:r>
-              <a:t>• Sans contexte: Copilot répond de façon générique, comme ChatGPT</a:t>
-            </a:r>
-          </a:p>
-          <a:p>
-            <a:pPr>
-              <a:spcAft>
-                <a:spcPts val="400"/>
-              </a:spcAft>
-              <a:defRPr sz="1400">
-                <a:solidFill>
-                  <a:srgbClr val="2B2B2B"/>
-                </a:solidFill>
-                <a:latin typeface="Calibri"/>
-              </a:defRPr>
-            </a:pPr>
-            <a:r>
-              <a:t>• Avec contexte: Copilot utilise VOS documents, VOS procédures</a:t>
-            </a:r>
-          </a:p>
-          <a:p>
-            <a:pPr>
-              <a:spcAft>
-                <a:spcPts val="400"/>
-              </a:spcAft>
-              <a:defRPr sz="1400">
-                <a:solidFill>
-                  <a:srgbClr val="2B2B2B"/>
-                </a:solidFill>
-                <a:latin typeface="Calibri"/>
-              </a:defRPr>
-            </a:pPr>
-            <a:r>
-              <a:t>• Exemple: «Résume la politique de sécurité informatique» → va chercher le document sur SharePoint</a:t>
-            </a:r>
-          </a:p>
-        </p:txBody>
-      </p:sp>
-      <p:sp>
-        <p:nvSpPr>
-          <p:cNvPr id="5" name="Rectangle 4"/>
+          <p:cNvPr id="4" name="Rectangle 3"/>
           <p:cNvSpPr/>
           <p:nvPr/>
         </p:nvSpPr>
         <p:spPr>
           <a:xfrm>
-            <a:off x="457200" y="3017520"/>
-            <a:ext cx="5212080" cy="3657600"/>
+            <a:off x="457200" y="1508760"/>
+            <a:ext cx="11274552" cy="18288"/>
           </a:xfrm>
           <a:prstGeom prst="rect">
             <a:avLst/>
           </a:prstGeom>
           <a:solidFill>
-            <a:srgbClr val="FFFFFF"/>
+            <a:srgbClr val="00874E"/>
           </a:solidFill>
           <a:ln>
-            <a:solidFill>
-              <a:srgbClr val="E0E0E0"/>
-            </a:solidFill>
+            <a:noFill/>
           </a:ln>
+          <a:effectLst/>
         </p:spPr>
         <p:style>
           <a:lnRef idx="1">
@@ -5074,14 +5397,14 @@
       </p:sp>
       <p:sp>
         <p:nvSpPr>
-          <p:cNvPr id="6" name="TextBox 5"/>
+          <p:cNvPr id="5" name="TextBox 4"/>
           <p:cNvSpPr txBox="1"/>
           <p:nvPr/>
         </p:nvSpPr>
         <p:spPr>
           <a:xfrm>
-            <a:off x="731520" y="3200400"/>
-            <a:ext cx="4663440" cy="457200"/>
+            <a:off x="457200" y="1737360"/>
+            <a:ext cx="10972800" cy="1188720"/>
           </a:xfrm>
           <a:prstGeom prst="rect">
             <a:avLst/>
@@ -5094,207 +5417,65 @@
           </a:bodyPr>
           <a:lstStyle/>
           <a:p>
-            <a:pPr algn="l">
-              <a:defRPr sz="1800" b="1">
-                <a:solidFill>
-                  <a:srgbClr val="EF4444"/>
-                </a:solidFill>
-                <a:latin typeface="Calibri"/>
-              </a:defRPr>
-            </a:pPr>
-            <a:r>
-              <a:t>❌ Sans connexion aux docs</a:t>
-            </a:r>
-          </a:p>
-        </p:txBody>
-      </p:sp>
-      <p:sp>
-        <p:nvSpPr>
-          <p:cNvPr id="7" name="TextBox 6"/>
-          <p:cNvSpPr txBox="1"/>
-          <p:nvPr/>
-        </p:nvSpPr>
-        <p:spPr>
-          <a:xfrm>
-            <a:off x="731520" y="3657600"/>
-            <a:ext cx="4663440" cy="2743200"/>
-          </a:xfrm>
-          <a:prstGeom prst="rect">
-            <a:avLst/>
-          </a:prstGeom>
-          <a:noFill/>
-        </p:spPr>
-        <p:txBody>
-          <a:bodyPr wrap="square">
-            <a:spAutoFit/>
-          </a:bodyPr>
-          <a:lstStyle/>
-          <a:p>
-            <a:pPr>
-              <a:spcAft>
-                <a:spcPts val="400"/>
-              </a:spcAft>
-              <a:defRPr sz="1300">
-                <a:solidFill>
-                  <a:srgbClr val="2B2B2B"/>
-                </a:solidFill>
-                <a:latin typeface="Calibri"/>
-              </a:defRPr>
-            </a:pPr>
-            <a:r>
-              <a:t>«Écris une politique de</a:t>
-            </a:r>
-          </a:p>
-          <a:p>
-            <a:pPr>
-              <a:spcAft>
-                <a:spcPts val="400"/>
-              </a:spcAft>
-              <a:defRPr sz="1300">
-                <a:solidFill>
-                  <a:srgbClr val="2B2B2B"/>
-                </a:solidFill>
-                <a:latin typeface="Calibri"/>
-              </a:defRPr>
-            </a:pPr>
-            <a:r>
-              <a:t>sécurité informatique»</a:t>
-            </a:r>
-          </a:p>
-          <a:p>
-            <a:pPr>
-              <a:spcAft>
-                <a:spcPts val="400"/>
-              </a:spcAft>
-              <a:defRPr sz="1300">
-                <a:solidFill>
-                  <a:srgbClr val="2B2B2B"/>
-                </a:solidFill>
-                <a:latin typeface="Calibri"/>
-              </a:defRPr>
-            </a:pPr>
-          </a:p>
-          <a:p>
-            <a:pPr>
-              <a:spcAft>
-                <a:spcPts val="400"/>
-              </a:spcAft>
-              <a:defRPr sz="1300">
-                <a:solidFill>
-                  <a:srgbClr val="2B2B2B"/>
-                </a:solidFill>
-                <a:latin typeface="Calibri"/>
-              </a:defRPr>
-            </a:pPr>
-            <a:r>
-              <a:t>→ Réponse générique</a:t>
-            </a:r>
-          </a:p>
-          <a:p>
-            <a:pPr>
-              <a:spcAft>
-                <a:spcPts val="400"/>
-              </a:spcAft>
-              <a:defRPr sz="1300">
-                <a:solidFill>
-                  <a:srgbClr val="2B2B2B"/>
-                </a:solidFill>
-                <a:latin typeface="Calibri"/>
-              </a:defRPr>
-            </a:pPr>
-            <a:r>
-              <a:t>   qui pourrait être</a:t>
-            </a:r>
-          </a:p>
-          <a:p>
-            <a:pPr>
-              <a:spcAft>
-                <a:spcPts val="400"/>
-              </a:spcAft>
-              <a:defRPr sz="1300">
-                <a:solidFill>
-                  <a:srgbClr val="2B2B2B"/>
-                </a:solidFill>
-                <a:latin typeface="Calibri"/>
-              </a:defRPr>
-            </a:pPr>
-            <a:r>
-              <a:t>   celle de n'importe</a:t>
-            </a:r>
-          </a:p>
-          <a:p>
-            <a:pPr>
-              <a:spcAft>
-                <a:spcPts val="400"/>
-              </a:spcAft>
-              <a:defRPr sz="1300">
-                <a:solidFill>
-                  <a:srgbClr val="2B2B2B"/>
-                </a:solidFill>
-                <a:latin typeface="Calibri"/>
-              </a:defRPr>
-            </a:pPr>
-            <a:r>
-              <a:t>   quelle entreprise</a:t>
-            </a:r>
-          </a:p>
-          <a:p>
-            <a:pPr>
-              <a:spcAft>
-                <a:spcPts val="400"/>
-              </a:spcAft>
-              <a:defRPr sz="1300">
-                <a:solidFill>
-                  <a:srgbClr val="2B2B2B"/>
-                </a:solidFill>
-                <a:latin typeface="Calibri"/>
-              </a:defRPr>
-            </a:pPr>
-          </a:p>
-          <a:p>
-            <a:pPr>
-              <a:spcAft>
-                <a:spcPts val="400"/>
-              </a:spcAft>
-              <a:defRPr sz="1300">
-                <a:solidFill>
-                  <a:srgbClr val="2B2B2B"/>
-                </a:solidFill>
-                <a:latin typeface="Calibri"/>
-              </a:defRPr>
-            </a:pPr>
-            <a:r>
-              <a:t>   À jeter ou à</a:t>
-            </a:r>
-          </a:p>
-          <a:p>
-            <a:pPr>
-              <a:spcAft>
-                <a:spcPts val="400"/>
-              </a:spcAft>
-              <a:defRPr sz="1300">
-                <a:solidFill>
-                  <a:srgbClr val="2B2B2B"/>
-                </a:solidFill>
-                <a:latin typeface="Calibri"/>
-              </a:defRPr>
-            </a:pPr>
-            <a:r>
-              <a:t>   tout réécrire</a:t>
-            </a:r>
-          </a:p>
-        </p:txBody>
-      </p:sp>
-      <p:sp>
-        <p:nvSpPr>
-          <p:cNvPr id="8" name="Rectangle 7"/>
+            <a:pPr>
+              <a:spcAft>
+                <a:spcPts val="400"/>
+              </a:spcAft>
+              <a:defRPr sz="1400">
+                <a:solidFill>
+                  <a:srgbClr val="2B2B2B"/>
+                </a:solidFill>
+                <a:latin typeface="Calibri"/>
+              </a:defRPr>
+            </a:pPr>
+            <a:r>
+              <a:t>• Sans contexte: Copilot répond de façon générique, comme ChatGPT</a:t>
+            </a:r>
+          </a:p>
+          <a:p>
+            <a:pPr>
+              <a:spcAft>
+                <a:spcPts val="400"/>
+              </a:spcAft>
+              <a:defRPr sz="1400">
+                <a:solidFill>
+                  <a:srgbClr val="2B2B2B"/>
+                </a:solidFill>
+                <a:latin typeface="Calibri"/>
+              </a:defRPr>
+            </a:pPr>
+            <a:r>
+              <a:t>• Avec contexte: Copilot utilise VOS documents, VOS procédures</a:t>
+            </a:r>
+          </a:p>
+          <a:p>
+            <a:pPr>
+              <a:spcAft>
+                <a:spcPts val="400"/>
+              </a:spcAft>
+              <a:defRPr sz="1400">
+                <a:solidFill>
+                  <a:srgbClr val="2B2B2B"/>
+                </a:solidFill>
+                <a:latin typeface="Calibri"/>
+              </a:defRPr>
+            </a:pPr>
+            <a:r>
+              <a:t>• Exemple: «Résume la politique de sécurité informatique» → va chercher le document sur SharePoint</a:t>
+            </a:r>
+          </a:p>
+        </p:txBody>
+      </p:sp>
+      <p:sp>
+        <p:nvSpPr>
+          <p:cNvPr id="6" name="Rectangle 5"/>
           <p:cNvSpPr/>
           <p:nvPr/>
         </p:nvSpPr>
         <p:spPr>
           <a:xfrm>
-            <a:off x="5943600" y="3017520"/>
-            <a:ext cx="5212080" cy="3657600"/>
+            <a:off x="457200" y="2926080"/>
+            <a:ext cx="5212080" cy="3291840"/>
           </a:xfrm>
           <a:prstGeom prst="rect">
             <a:avLst/>
@@ -5307,6 +5488,7 @@
               <a:srgbClr val="E0E0E0"/>
             </a:solidFill>
           </a:ln>
+          <a:effectLst/>
         </p:spPr>
         <p:style>
           <a:lnRef idx="1">
@@ -5330,6 +5512,66 @@
           </a:p>
         </p:txBody>
       </p:sp>
+      <p:pic>
+        <p:nvPicPr>
+          <p:cNvPr id="7" name="Picture 6" descr="unlink_EF4444_30.png"/>
+          <p:cNvPicPr>
+            <a:picLocks noChangeAspect="1"/>
+          </p:cNvPicPr>
+          <p:nvPr/>
+        </p:nvPicPr>
+        <p:blipFill>
+          <a:blip r:embed="rId3"/>
+          <a:stretch>
+            <a:fillRect/>
+          </a:stretch>
+        </p:blipFill>
+        <p:spPr>
+          <a:xfrm>
+            <a:off x="713232" y="3090672"/>
+            <a:ext cx="292608" cy="292608"/>
+          </a:xfrm>
+          <a:prstGeom prst="rect">
+            <a:avLst/>
+          </a:prstGeom>
+        </p:spPr>
+      </p:pic>
+      <p:sp>
+        <p:nvSpPr>
+          <p:cNvPr id="8" name="TextBox 7"/>
+          <p:cNvSpPr txBox="1"/>
+          <p:nvPr/>
+        </p:nvSpPr>
+        <p:spPr>
+          <a:xfrm>
+            <a:off x="1115568" y="3108960"/>
+            <a:ext cx="4370832" cy="457200"/>
+          </a:xfrm>
+          <a:prstGeom prst="rect">
+            <a:avLst/>
+          </a:prstGeom>
+          <a:noFill/>
+        </p:spPr>
+        <p:txBody>
+          <a:bodyPr wrap="square" lIns="45720" rIns="45720" tIns="18288" bIns="18288">
+            <a:spAutoFit/>
+          </a:bodyPr>
+          <a:lstStyle/>
+          <a:p>
+            <a:pPr algn="l">
+              <a:defRPr sz="1700" b="1">
+                <a:solidFill>
+                  <a:srgbClr val="EF4444"/>
+                </a:solidFill>
+                <a:latin typeface="Calibri"/>
+              </a:defRPr>
+            </a:pPr>
+            <a:r>
+              <a:t>Sans connexion aux docs</a:t>
+            </a:r>
+          </a:p>
+        </p:txBody>
+      </p:sp>
       <p:sp>
         <p:nvSpPr>
           <p:cNvPr id="9" name="TextBox 8"/>
@@ -5338,8 +5580,8 @@
         </p:nvSpPr>
         <p:spPr>
           <a:xfrm>
-            <a:off x="6217920" y="3200400"/>
-            <a:ext cx="4663440" cy="457200"/>
+            <a:off x="731520" y="3703320"/>
+            <a:ext cx="4663440" cy="2331720"/>
           </a:xfrm>
           <a:prstGeom prst="rect">
             <a:avLst/>
@@ -5352,30 +5594,277 @@
           </a:bodyPr>
           <a:lstStyle/>
           <a:p>
-            <a:pPr algn="l">
-              <a:defRPr sz="1800" b="1">
-                <a:solidFill>
-                  <a:srgbClr val="10B981"/>
-                </a:solidFill>
-                <a:latin typeface="Calibri"/>
-              </a:defRPr>
-            </a:pPr>
-            <a:r>
-              <a:t>✅ Avec connexion aux docs</a:t>
-            </a:r>
-          </a:p>
-        </p:txBody>
-      </p:sp>
-      <p:sp>
-        <p:nvSpPr>
-          <p:cNvPr id="10" name="TextBox 9"/>
+            <a:pPr>
+              <a:spcAft>
+                <a:spcPts val="400"/>
+              </a:spcAft>
+              <a:defRPr sz="1300">
+                <a:solidFill>
+                  <a:srgbClr val="2B2B2B"/>
+                </a:solidFill>
+                <a:latin typeface="Calibri"/>
+              </a:defRPr>
+            </a:pPr>
+            <a:r>
+              <a:t>«Écris une politique de</a:t>
+            </a:r>
+          </a:p>
+          <a:p>
+            <a:pPr>
+              <a:spcAft>
+                <a:spcPts val="400"/>
+              </a:spcAft>
+              <a:defRPr sz="1300">
+                <a:solidFill>
+                  <a:srgbClr val="2B2B2B"/>
+                </a:solidFill>
+                <a:latin typeface="Calibri"/>
+              </a:defRPr>
+            </a:pPr>
+            <a:r>
+              <a:t>sécurité informatique»</a:t>
+            </a:r>
+          </a:p>
+          <a:p>
+            <a:pPr>
+              <a:spcAft>
+                <a:spcPts val="400"/>
+              </a:spcAft>
+              <a:defRPr sz="1300">
+                <a:solidFill>
+                  <a:srgbClr val="2B2B2B"/>
+                </a:solidFill>
+                <a:latin typeface="Calibri"/>
+              </a:defRPr>
+            </a:pPr>
+          </a:p>
+          <a:p>
+            <a:pPr>
+              <a:spcAft>
+                <a:spcPts val="400"/>
+              </a:spcAft>
+              <a:defRPr sz="1300">
+                <a:solidFill>
+                  <a:srgbClr val="2B2B2B"/>
+                </a:solidFill>
+                <a:latin typeface="Calibri"/>
+              </a:defRPr>
+            </a:pPr>
+            <a:r>
+              <a:t>→ Réponse générique</a:t>
+            </a:r>
+          </a:p>
+          <a:p>
+            <a:pPr>
+              <a:spcAft>
+                <a:spcPts val="400"/>
+              </a:spcAft>
+              <a:defRPr sz="1300">
+                <a:solidFill>
+                  <a:srgbClr val="2B2B2B"/>
+                </a:solidFill>
+                <a:latin typeface="Calibri"/>
+              </a:defRPr>
+            </a:pPr>
+            <a:r>
+              <a:t>qui pourrait être</a:t>
+            </a:r>
+          </a:p>
+          <a:p>
+            <a:pPr>
+              <a:spcAft>
+                <a:spcPts val="400"/>
+              </a:spcAft>
+              <a:defRPr sz="1300">
+                <a:solidFill>
+                  <a:srgbClr val="2B2B2B"/>
+                </a:solidFill>
+                <a:latin typeface="Calibri"/>
+              </a:defRPr>
+            </a:pPr>
+            <a:r>
+              <a:t>celle de n'importe</a:t>
+            </a:r>
+          </a:p>
+          <a:p>
+            <a:pPr>
+              <a:spcAft>
+                <a:spcPts val="400"/>
+              </a:spcAft>
+              <a:defRPr sz="1300">
+                <a:solidFill>
+                  <a:srgbClr val="2B2B2B"/>
+                </a:solidFill>
+                <a:latin typeface="Calibri"/>
+              </a:defRPr>
+            </a:pPr>
+            <a:r>
+              <a:t>quelle entreprise</a:t>
+            </a:r>
+          </a:p>
+          <a:p>
+            <a:pPr>
+              <a:spcAft>
+                <a:spcPts val="400"/>
+              </a:spcAft>
+              <a:defRPr sz="1300">
+                <a:solidFill>
+                  <a:srgbClr val="2B2B2B"/>
+                </a:solidFill>
+                <a:latin typeface="Calibri"/>
+              </a:defRPr>
+            </a:pPr>
+          </a:p>
+          <a:p>
+            <a:pPr>
+              <a:spcAft>
+                <a:spcPts val="400"/>
+              </a:spcAft>
+              <a:defRPr sz="1300">
+                <a:solidFill>
+                  <a:srgbClr val="2B2B2B"/>
+                </a:solidFill>
+                <a:latin typeface="Calibri"/>
+              </a:defRPr>
+            </a:pPr>
+            <a:r>
+              <a:t>À jeter ou à</a:t>
+            </a:r>
+          </a:p>
+          <a:p>
+            <a:pPr>
+              <a:spcAft>
+                <a:spcPts val="400"/>
+              </a:spcAft>
+              <a:defRPr sz="1300">
+                <a:solidFill>
+                  <a:srgbClr val="2B2B2B"/>
+                </a:solidFill>
+                <a:latin typeface="Calibri"/>
+              </a:defRPr>
+            </a:pPr>
+            <a:r>
+              <a:t>tout réécrire</a:t>
+            </a:r>
+          </a:p>
+        </p:txBody>
+      </p:sp>
+      <p:sp>
+        <p:nvSpPr>
+          <p:cNvPr id="10" name="Rectangle 9"/>
+          <p:cNvSpPr/>
+          <p:nvPr/>
+        </p:nvSpPr>
+        <p:spPr>
+          <a:xfrm>
+            <a:off x="5943600" y="2926080"/>
+            <a:ext cx="5212080" cy="3291840"/>
+          </a:xfrm>
+          <a:prstGeom prst="rect">
+            <a:avLst/>
+          </a:prstGeom>
+          <a:solidFill>
+            <a:srgbClr val="FFFFFF"/>
+          </a:solidFill>
+          <a:ln>
+            <a:solidFill>
+              <a:srgbClr val="E0E0E0"/>
+            </a:solidFill>
+          </a:ln>
+          <a:effectLst/>
+        </p:spPr>
+        <p:style>
+          <a:lnRef idx="1">
+            <a:schemeClr val="accent1"/>
+          </a:lnRef>
+          <a:fillRef idx="3">
+            <a:schemeClr val="accent1"/>
+          </a:fillRef>
+          <a:effectRef idx="2">
+            <a:schemeClr val="accent1"/>
+          </a:effectRef>
+          <a:fontRef idx="minor">
+            <a:schemeClr val="lt1"/>
+          </a:fontRef>
+        </p:style>
+        <p:txBody>
+          <a:bodyPr rtlCol="0" anchor="ctr"/>
+          <a:lstStyle/>
+          <a:p>
+            <a:pPr algn="ctr"/>
+          </a:p>
+        </p:txBody>
+      </p:sp>
+      <p:pic>
+        <p:nvPicPr>
+          <p:cNvPr id="11" name="Picture 10" descr="link_00874E_30.png"/>
+          <p:cNvPicPr>
+            <a:picLocks noChangeAspect="1"/>
+          </p:cNvPicPr>
+          <p:nvPr/>
+        </p:nvPicPr>
+        <p:blipFill>
+          <a:blip r:embed="rId4"/>
+          <a:stretch>
+            <a:fillRect/>
+          </a:stretch>
+        </p:blipFill>
+        <p:spPr>
+          <a:xfrm>
+            <a:off x="6199632" y="3090672"/>
+            <a:ext cx="292608" cy="292608"/>
+          </a:xfrm>
+          <a:prstGeom prst="rect">
+            <a:avLst/>
+          </a:prstGeom>
+        </p:spPr>
+      </p:pic>
+      <p:sp>
+        <p:nvSpPr>
+          <p:cNvPr id="12" name="TextBox 11"/>
           <p:cNvSpPr txBox="1"/>
           <p:nvPr/>
         </p:nvSpPr>
         <p:spPr>
           <a:xfrm>
-            <a:off x="6217920" y="3657600"/>
-            <a:ext cx="4663440" cy="2743200"/>
+            <a:off x="6601968" y="3108960"/>
+            <a:ext cx="4370831" cy="457200"/>
+          </a:xfrm>
+          <a:prstGeom prst="rect">
+            <a:avLst/>
+          </a:prstGeom>
+          <a:noFill/>
+        </p:spPr>
+        <p:txBody>
+          <a:bodyPr wrap="square" lIns="45720" rIns="45720" tIns="18288" bIns="18288">
+            <a:spAutoFit/>
+          </a:bodyPr>
+          <a:lstStyle/>
+          <a:p>
+            <a:pPr algn="l">
+              <a:defRPr sz="1700" b="1">
+                <a:solidFill>
+                  <a:srgbClr val="00874E"/>
+                </a:solidFill>
+                <a:latin typeface="Calibri"/>
+              </a:defRPr>
+            </a:pPr>
+            <a:r>
+              <a:t>Avec connexion aux docs</a:t>
+            </a:r>
+          </a:p>
+        </p:txBody>
+      </p:sp>
+      <p:sp>
+        <p:nvSpPr>
+          <p:cNvPr id="13" name="TextBox 12"/>
+          <p:cNvSpPr txBox="1"/>
+          <p:nvPr/>
+        </p:nvSpPr>
+        <p:spPr>
+          <a:xfrm>
+            <a:off x="6217920" y="3703320"/>
+            <a:ext cx="4663440" cy="2331720"/>
           </a:xfrm>
           <a:prstGeom prst="rect">
             <a:avLst/>
@@ -5477,7 +5966,7 @@
               </a:defRPr>
             </a:pPr>
             <a:r>
-              <a:t>   le document, le lit,</a:t>
+              <a:t>le document, le lit,</a:t>
             </a:r>
           </a:p>
           <a:p>
@@ -5493,7 +5982,7 @@
               </a:defRPr>
             </a:pPr>
             <a:r>
-              <a:t>   et vous fait un</a:t>
+              <a:t>et vous fait un</a:t>
             </a:r>
           </a:p>
           <a:p>
@@ -5509,7 +5998,7 @@
               </a:defRPr>
             </a:pPr>
             <a:r>
-              <a:t>   résumé sur mesure</a:t>
+              <a:t>résumé sur mesure</a:t>
             </a:r>
           </a:p>
           <a:p>
@@ -5538,7 +6027,123 @@
               </a:defRPr>
             </a:pPr>
             <a:r>
-              <a:t>   Prêt à utiliser!</a:t>
+              <a:t>Prêt à utiliser!</a:t>
+            </a:r>
+          </a:p>
+        </p:txBody>
+      </p:sp>
+      <p:sp>
+        <p:nvSpPr>
+          <p:cNvPr id="14" name="Rectangle 13"/>
+          <p:cNvSpPr/>
+          <p:nvPr/>
+        </p:nvSpPr>
+        <p:spPr>
+          <a:xfrm>
+            <a:off x="457200" y="6446520"/>
+            <a:ext cx="11274552" cy="13716"/>
+          </a:xfrm>
+          <a:prstGeom prst="rect">
+            <a:avLst/>
+          </a:prstGeom>
+          <a:solidFill>
+            <a:srgbClr val="00874E"/>
+          </a:solidFill>
+          <a:ln>
+            <a:noFill/>
+          </a:ln>
+          <a:effectLst/>
+        </p:spPr>
+        <p:style>
+          <a:lnRef idx="1">
+            <a:schemeClr val="accent1"/>
+          </a:lnRef>
+          <a:fillRef idx="3">
+            <a:schemeClr val="accent1"/>
+          </a:fillRef>
+          <a:effectRef idx="2">
+            <a:schemeClr val="accent1"/>
+          </a:effectRef>
+          <a:fontRef idx="minor">
+            <a:schemeClr val="lt1"/>
+          </a:fontRef>
+        </p:style>
+        <p:txBody>
+          <a:bodyPr rtlCol="0" anchor="ctr"/>
+          <a:lstStyle/>
+          <a:p>
+            <a:pPr algn="ctr"/>
+          </a:p>
+        </p:txBody>
+      </p:sp>
+      <p:sp>
+        <p:nvSpPr>
+          <p:cNvPr id="15" name="TextBox 14"/>
+          <p:cNvSpPr txBox="1"/>
+          <p:nvPr/>
+        </p:nvSpPr>
+        <p:spPr>
+          <a:xfrm>
+            <a:off x="457200" y="6537960"/>
+            <a:ext cx="5486400" cy="274320"/>
+          </a:xfrm>
+          <a:prstGeom prst="rect">
+            <a:avLst/>
+          </a:prstGeom>
+          <a:noFill/>
+        </p:spPr>
+        <p:txBody>
+          <a:bodyPr wrap="square" lIns="45720" rIns="45720" tIns="18288" bIns="18288">
+            <a:spAutoFit/>
+          </a:bodyPr>
+          <a:lstStyle/>
+          <a:p>
+            <a:pPr algn="l">
+              <a:defRPr sz="1000" b="0">
+                <a:solidFill>
+                  <a:srgbClr val="6B6B6B"/>
+                </a:solidFill>
+                <a:latin typeface="Calibri"/>
+              </a:defRPr>
+            </a:pPr>
+            <a:r>
+              <a:t>La minute Copilot</a:t>
+            </a:r>
+          </a:p>
+        </p:txBody>
+      </p:sp>
+      <p:sp>
+        <p:nvSpPr>
+          <p:cNvPr id="16" name="TextBox 15"/>
+          <p:cNvSpPr txBox="1"/>
+          <p:nvPr/>
+        </p:nvSpPr>
+        <p:spPr>
+          <a:xfrm>
+            <a:off x="10972800" y="6537960"/>
+            <a:ext cx="822960" cy="274320"/>
+          </a:xfrm>
+          <a:prstGeom prst="rect">
+            <a:avLst/>
+          </a:prstGeom>
+          <a:noFill/>
+        </p:spPr>
+        <p:txBody>
+          <a:bodyPr wrap="square" lIns="45720" rIns="45720" tIns="18288" bIns="18288">
+            <a:spAutoFit/>
+          </a:bodyPr>
+          <a:lstStyle/>
+          <a:p>
+            <a:pPr algn="r">
+              <a:defRPr sz="1000" b="0">
+                <a:solidFill>
+                  <a:srgbClr val="6B6B6B"/>
+                </a:solidFill>
+                <a:latin typeface="Calibri"/>
+              </a:defRPr>
+            </a:pPr>
+            <a:r>
+              <a:t>3</a:t>
             </a:r>
           </a:p>
         </p:txBody>
@@ -5557,7 +6162,7 @@
     <p:bg>
       <p:bgPr>
         <a:solidFill>
-          <a:srgbClr val="FFFFFF"/>
+          <a:srgbClr val="E6F0EA"/>
         </a:solidFill>
         <a:effectLst/>
       </p:bgPr>
@@ -5577,8 +6182,8 @@
         </p:nvSpPr>
         <p:spPr>
           <a:xfrm>
-            <a:off x="457200" y="274320"/>
-            <a:ext cx="10972800" cy="640080"/>
+            <a:off x="457200" y="365760"/>
+            <a:ext cx="10972800" cy="731520"/>
           </a:xfrm>
           <a:prstGeom prst="rect">
             <a:avLst/>
@@ -5586,21 +6191,21 @@
           <a:noFill/>
         </p:spPr>
         <p:txBody>
-          <a:bodyPr wrap="square">
+          <a:bodyPr wrap="square" lIns="45720" rIns="45720" tIns="18288" bIns="18288">
             <a:spAutoFit/>
           </a:bodyPr>
           <a:lstStyle/>
           <a:p>
             <a:pPr algn="l">
-              <a:defRPr sz="3200" b="1">
-                <a:solidFill>
-                  <a:srgbClr val="2B2B2B"/>
-                </a:solidFill>
-                <a:latin typeface="Calibri"/>
-              </a:defRPr>
-            </a:pPr>
-            <a:r>
-              <a:t>🏦 Exemples concrets en institution financière</a:t>
+              <a:defRPr sz="2800" b="1">
+                <a:solidFill>
+                  <a:srgbClr val="006B3F"/>
+                </a:solidFill>
+                <a:latin typeface="Calibri"/>
+              </a:defRPr>
+            </a:pPr>
+            <a:r>
+              <a:t>Exemples concrets en institution financière</a:t>
             </a:r>
           </a:p>
         </p:txBody>
@@ -5613,8 +6218,8 @@
         </p:nvSpPr>
         <p:spPr>
           <a:xfrm>
-            <a:off x="457200" y="914400"/>
-            <a:ext cx="10972800" cy="457200"/>
+            <a:off x="457200" y="1005840"/>
+            <a:ext cx="10972800" cy="411480"/>
           </a:xfrm>
           <a:prstGeom prst="rect">
             <a:avLst/>
@@ -5622,13 +6227,13 @@
           <a:noFill/>
         </p:spPr>
         <p:txBody>
-          <a:bodyPr wrap="square">
+          <a:bodyPr wrap="square" lIns="45720" rIns="45720" tIns="18288" bIns="18288">
             <a:spAutoFit/>
           </a:bodyPr>
           <a:lstStyle/>
           <a:p>
             <a:pPr algn="l">
-              <a:defRPr sz="1800" b="0">
+              <a:defRPr sz="1500" b="0">
                 <a:solidFill>
                   <a:srgbClr val="6B6B6B"/>
                 </a:solidFill>
@@ -5643,97 +6248,25 @@
       </p:sp>
       <p:sp>
         <p:nvSpPr>
-          <p:cNvPr id="4" name="TextBox 3"/>
-          <p:cNvSpPr txBox="1"/>
-          <p:nvPr/>
-        </p:nvSpPr>
-        <p:spPr>
-          <a:xfrm>
-            <a:off x="457200" y="1554480"/>
-            <a:ext cx="10972800" cy="1371600"/>
-          </a:xfrm>
-          <a:prstGeom prst="rect">
-            <a:avLst/>
-          </a:prstGeom>
-          <a:noFill/>
-        </p:spPr>
-        <p:txBody>
-          <a:bodyPr wrap="square">
-            <a:spAutoFit/>
-          </a:bodyPr>
-          <a:lstStyle/>
-          <a:p>
-            <a:pPr>
-              <a:spcAft>
-                <a:spcPts val="400"/>
-              </a:spcAft>
-              <a:defRPr sz="1400">
-                <a:solidFill>
-                  <a:srgbClr val="2B2B2B"/>
-                </a:solidFill>
-                <a:latin typeface="Calibri"/>
-              </a:defRPr>
-            </a:pPr>
-            <a:r>
-              <a:t>• Copilot ne partage pas vos documents — il les lit, point.</a:t>
-            </a:r>
-          </a:p>
-          <a:p>
-            <a:pPr>
-              <a:spcAft>
-                <a:spcPts val="400"/>
-              </a:spcAft>
-              <a:defRPr sz="1400">
-                <a:solidFill>
-                  <a:srgbClr val="2B2B2B"/>
-                </a:solidFill>
-                <a:latin typeface="Calibri"/>
-              </a:defRPr>
-            </a:pPr>
-            <a:r>
-              <a:t>• Les données restent dans le périmètre Microsoft 365 de l'institution</a:t>
-            </a:r>
-          </a:p>
-          <a:p>
-            <a:pPr>
-              <a:spcAft>
-                <a:spcPts val="400"/>
-              </a:spcAft>
-              <a:defRPr sz="1400">
-                <a:solidFill>
-                  <a:srgbClr val="2B2B2B"/>
-                </a:solidFill>
-                <a:latin typeface="Calibri"/>
-              </a:defRPr>
-            </a:pPr>
-            <a:r>
-              <a:t>• Les permissions SharePoint sont appliquées — rien de plus</a:t>
-            </a:r>
-          </a:p>
-        </p:txBody>
-      </p:sp>
-      <p:sp>
-        <p:nvSpPr>
-          <p:cNvPr id="5" name="Rectangle 4"/>
+          <p:cNvPr id="4" name="Rectangle 3"/>
           <p:cNvSpPr/>
           <p:nvPr/>
         </p:nvSpPr>
         <p:spPr>
           <a:xfrm>
-            <a:off x="457200" y="3017520"/>
-            <a:ext cx="3383280" cy="3657600"/>
+            <a:off x="457200" y="1508760"/>
+            <a:ext cx="11274552" cy="18288"/>
           </a:xfrm>
           <a:prstGeom prst="rect">
             <a:avLst/>
           </a:prstGeom>
           <a:solidFill>
-            <a:srgbClr val="FFFFFF"/>
+            <a:srgbClr val="00874E"/>
           </a:solidFill>
           <a:ln>
-            <a:solidFill>
-              <a:srgbClr val="E0E0E0"/>
-            </a:solidFill>
+            <a:noFill/>
           </a:ln>
+          <a:effectLst/>
         </p:spPr>
         <p:style>
           <a:lnRef idx="1">
@@ -5759,14 +6292,14 @@
       </p:sp>
       <p:sp>
         <p:nvSpPr>
-          <p:cNvPr id="6" name="TextBox 5"/>
+          <p:cNvPr id="5" name="TextBox 4"/>
           <p:cNvSpPr txBox="1"/>
           <p:nvPr/>
         </p:nvSpPr>
         <p:spPr>
           <a:xfrm>
-            <a:off x="731520" y="3200400"/>
-            <a:ext cx="2834640" cy="457200"/>
+            <a:off x="457200" y="1737360"/>
+            <a:ext cx="10972800" cy="1188720"/>
           </a:xfrm>
           <a:prstGeom prst="rect">
             <a:avLst/>
@@ -5779,194 +6312,65 @@
           </a:bodyPr>
           <a:lstStyle/>
           <a:p>
-            <a:pPr algn="l">
-              <a:defRPr sz="1800" b="1">
-                <a:solidFill>
-                  <a:srgbClr val="0078D4"/>
-                </a:solidFill>
-                <a:latin typeface="Calibri"/>
-              </a:defRPr>
-            </a:pPr>
-            <a:r>
-              <a:t>📋 Scénario 1: Procédures</a:t>
-            </a:r>
-          </a:p>
-        </p:txBody>
-      </p:sp>
-      <p:sp>
-        <p:nvSpPr>
-          <p:cNvPr id="7" name="TextBox 6"/>
-          <p:cNvSpPr txBox="1"/>
-          <p:nvPr/>
-        </p:nvSpPr>
-        <p:spPr>
-          <a:xfrm>
-            <a:off x="731520" y="3657600"/>
-            <a:ext cx="2834640" cy="2743200"/>
-          </a:xfrm>
-          <a:prstGeom prst="rect">
-            <a:avLst/>
-          </a:prstGeom>
-          <a:noFill/>
-        </p:spPr>
-        <p:txBody>
-          <a:bodyPr wrap="square">
-            <a:spAutoFit/>
-          </a:bodyPr>
-          <a:lstStyle/>
-          <a:p>
-            <a:pPr>
-              <a:spcAft>
-                <a:spcPts val="400"/>
-              </a:spcAft>
-              <a:defRPr sz="1300">
-                <a:solidFill>
-                  <a:srgbClr val="2B2B2B"/>
-                </a:solidFill>
-                <a:latin typeface="Calibri"/>
-              </a:defRPr>
-            </a:pPr>
-            <a:r>
-              <a:t>«Trouve la procédure de</a:t>
-            </a:r>
-          </a:p>
-          <a:p>
-            <a:pPr>
-              <a:spcAft>
-                <a:spcPts val="400"/>
-              </a:spcAft>
-              <a:defRPr sz="1300">
-                <a:solidFill>
-                  <a:srgbClr val="2B2B2B"/>
-                </a:solidFill>
-                <a:latin typeface="Calibri"/>
-              </a:defRPr>
-            </a:pPr>
-            <a:r>
-              <a:t>demande d'accès pour</a:t>
-            </a:r>
-          </a:p>
-          <a:p>
-            <a:pPr>
-              <a:spcAft>
-                <a:spcPts val="400"/>
-              </a:spcAft>
-              <a:defRPr sz="1300">
-                <a:solidFill>
-                  <a:srgbClr val="2B2B2B"/>
-                </a:solidFill>
-                <a:latin typeface="Calibri"/>
-              </a:defRPr>
-            </a:pPr>
-            <a:r>
-              <a:t>l'application X sur</a:t>
-            </a:r>
-          </a:p>
-          <a:p>
-            <a:pPr>
-              <a:spcAft>
-                <a:spcPts val="400"/>
-              </a:spcAft>
-              <a:defRPr sz="1300">
-                <a:solidFill>
-                  <a:srgbClr val="2B2B2B"/>
-                </a:solidFill>
-                <a:latin typeface="Calibri"/>
-              </a:defRPr>
-            </a:pPr>
-            <a:r>
-              <a:t>SharePoint et résume-la</a:t>
-            </a:r>
-          </a:p>
-          <a:p>
-            <a:pPr>
-              <a:spcAft>
-                <a:spcPts val="400"/>
-              </a:spcAft>
-              <a:defRPr sz="1300">
-                <a:solidFill>
-                  <a:srgbClr val="2B2B2B"/>
-                </a:solidFill>
-                <a:latin typeface="Calibri"/>
-              </a:defRPr>
-            </a:pPr>
-            <a:r>
-              <a:t>en 5 étapes»</a:t>
-            </a:r>
-          </a:p>
-          <a:p>
-            <a:pPr>
-              <a:spcAft>
-                <a:spcPts val="400"/>
-              </a:spcAft>
-              <a:defRPr sz="1300">
-                <a:solidFill>
-                  <a:srgbClr val="2B2B2B"/>
-                </a:solidFill>
-                <a:latin typeface="Calibri"/>
-              </a:defRPr>
-            </a:pPr>
-          </a:p>
-          <a:p>
-            <a:pPr>
-              <a:spcAft>
-                <a:spcPts val="400"/>
-              </a:spcAft>
-              <a:defRPr sz="1300">
-                <a:solidFill>
-                  <a:srgbClr val="2B2B2B"/>
-                </a:solidFill>
-                <a:latin typeface="Calibri"/>
-              </a:defRPr>
-            </a:pPr>
-            <a:r>
-              <a:t>→ Copilot cherche dans</a:t>
-            </a:r>
-          </a:p>
-          <a:p>
-            <a:pPr>
-              <a:spcAft>
-                <a:spcPts val="400"/>
-              </a:spcAft>
-              <a:defRPr sz="1300">
-                <a:solidFill>
-                  <a:srgbClr val="2B2B2B"/>
-                </a:solidFill>
-                <a:latin typeface="Calibri"/>
-              </a:defRPr>
-            </a:pPr>
-            <a:r>
-              <a:t>   SharePoint, lit le doc,</a:t>
-            </a:r>
-          </a:p>
-          <a:p>
-            <a:pPr>
-              <a:spcAft>
-                <a:spcPts val="400"/>
-              </a:spcAft>
-              <a:defRPr sz="1300">
-                <a:solidFill>
-                  <a:srgbClr val="2B2B2B"/>
-                </a:solidFill>
-                <a:latin typeface="Calibri"/>
-              </a:defRPr>
-            </a:pPr>
-            <a:r>
-              <a:t>   résume. 30 secondes!</a:t>
-            </a:r>
-          </a:p>
-        </p:txBody>
-      </p:sp>
-      <p:sp>
-        <p:nvSpPr>
-          <p:cNvPr id="8" name="Rectangle 7"/>
+            <a:pPr>
+              <a:spcAft>
+                <a:spcPts val="400"/>
+              </a:spcAft>
+              <a:defRPr sz="1400">
+                <a:solidFill>
+                  <a:srgbClr val="2B2B2B"/>
+                </a:solidFill>
+                <a:latin typeface="Calibri"/>
+              </a:defRPr>
+            </a:pPr>
+            <a:r>
+              <a:t>• Copilot ne partage pas vos documents — il les lit, point.</a:t>
+            </a:r>
+          </a:p>
+          <a:p>
+            <a:pPr>
+              <a:spcAft>
+                <a:spcPts val="400"/>
+              </a:spcAft>
+              <a:defRPr sz="1400">
+                <a:solidFill>
+                  <a:srgbClr val="2B2B2B"/>
+                </a:solidFill>
+                <a:latin typeface="Calibri"/>
+              </a:defRPr>
+            </a:pPr>
+            <a:r>
+              <a:t>• Les données restent dans le périmètre Microsoft 365 de l'institution</a:t>
+            </a:r>
+          </a:p>
+          <a:p>
+            <a:pPr>
+              <a:spcAft>
+                <a:spcPts val="400"/>
+              </a:spcAft>
+              <a:defRPr sz="1400">
+                <a:solidFill>
+                  <a:srgbClr val="2B2B2B"/>
+                </a:solidFill>
+                <a:latin typeface="Calibri"/>
+              </a:defRPr>
+            </a:pPr>
+            <a:r>
+              <a:t>• Les permissions SharePoint sont appliquées — rien de plus</a:t>
+            </a:r>
+          </a:p>
+        </p:txBody>
+      </p:sp>
+      <p:sp>
+        <p:nvSpPr>
+          <p:cNvPr id="6" name="Rectangle 5"/>
           <p:cNvSpPr/>
           <p:nvPr/>
         </p:nvSpPr>
         <p:spPr>
           <a:xfrm>
-            <a:off x="4114800" y="3017520"/>
-            <a:ext cx="3383280" cy="3657600"/>
+            <a:off x="457200" y="2926080"/>
+            <a:ext cx="3383280" cy="3291840"/>
           </a:xfrm>
           <a:prstGeom prst="rect">
             <a:avLst/>
@@ -5979,6 +6383,7 @@
               <a:srgbClr val="E0E0E0"/>
             </a:solidFill>
           </a:ln>
+          <a:effectLst/>
         </p:spPr>
         <p:style>
           <a:lnRef idx="1">
@@ -6002,6 +6407,66 @@
           </a:p>
         </p:txBody>
       </p:sp>
+      <p:pic>
+        <p:nvPicPr>
+          <p:cNvPr id="7" name="Picture 6" descr="file-text_00874E_30.png"/>
+          <p:cNvPicPr>
+            <a:picLocks noChangeAspect="1"/>
+          </p:cNvPicPr>
+          <p:nvPr/>
+        </p:nvPicPr>
+        <p:blipFill>
+          <a:blip r:embed="rId3"/>
+          <a:stretch>
+            <a:fillRect/>
+          </a:stretch>
+        </p:blipFill>
+        <p:spPr>
+          <a:xfrm>
+            <a:off x="713232" y="3090672"/>
+            <a:ext cx="292608" cy="292608"/>
+          </a:xfrm>
+          <a:prstGeom prst="rect">
+            <a:avLst/>
+          </a:prstGeom>
+        </p:spPr>
+      </p:pic>
+      <p:sp>
+        <p:nvSpPr>
+          <p:cNvPr id="8" name="TextBox 7"/>
+          <p:cNvSpPr txBox="1"/>
+          <p:nvPr/>
+        </p:nvSpPr>
+        <p:spPr>
+          <a:xfrm>
+            <a:off x="1115568" y="3108960"/>
+            <a:ext cx="2542032" cy="457200"/>
+          </a:xfrm>
+          <a:prstGeom prst="rect">
+            <a:avLst/>
+          </a:prstGeom>
+          <a:noFill/>
+        </p:spPr>
+        <p:txBody>
+          <a:bodyPr wrap="square" lIns="45720" rIns="45720" tIns="18288" bIns="18288">
+            <a:spAutoFit/>
+          </a:bodyPr>
+          <a:lstStyle/>
+          <a:p>
+            <a:pPr algn="l">
+              <a:defRPr sz="1700" b="1">
+                <a:solidFill>
+                  <a:srgbClr val="00874E"/>
+                </a:solidFill>
+                <a:latin typeface="Calibri"/>
+              </a:defRPr>
+            </a:pPr>
+            <a:r>
+              <a:t>Scénario 1: Procédures</a:t>
+            </a:r>
+          </a:p>
+        </p:txBody>
+      </p:sp>
       <p:sp>
         <p:nvSpPr>
           <p:cNvPr id="9" name="TextBox 8"/>
@@ -6010,8 +6475,8 @@
         </p:nvSpPr>
         <p:spPr>
           <a:xfrm>
-            <a:off x="4389120" y="3200400"/>
-            <a:ext cx="2834640" cy="457200"/>
+            <a:off x="731520" y="3703320"/>
+            <a:ext cx="2834640" cy="2331720"/>
           </a:xfrm>
           <a:prstGeom prst="rect">
             <a:avLst/>
@@ -6024,42 +6489,6 @@
           </a:bodyPr>
           <a:lstStyle/>
           <a:p>
-            <a:pPr algn="l">
-              <a:defRPr sz="1800" b="1">
-                <a:solidFill>
-                  <a:srgbClr val="10B981"/>
-                </a:solidFill>
-                <a:latin typeface="Calibri"/>
-              </a:defRPr>
-            </a:pPr>
-            <a:r>
-              <a:t>📊 Scénario 2: Rapports</a:t>
-            </a:r>
-          </a:p>
-        </p:txBody>
-      </p:sp>
-      <p:sp>
-        <p:nvSpPr>
-          <p:cNvPr id="10" name="TextBox 9"/>
-          <p:cNvSpPr txBox="1"/>
-          <p:nvPr/>
-        </p:nvSpPr>
-        <p:spPr>
-          <a:xfrm>
-            <a:off x="4389120" y="3657600"/>
-            <a:ext cx="2834640" cy="2743200"/>
-          </a:xfrm>
-          <a:prstGeom prst="rect">
-            <a:avLst/>
-          </a:prstGeom>
-          <a:noFill/>
-        </p:spPr>
-        <p:txBody>
-          <a:bodyPr wrap="square">
-            <a:spAutoFit/>
-          </a:bodyPr>
-          <a:lstStyle/>
-          <a:p>
             <a:pPr>
               <a:spcAft>
                 <a:spcPts val="400"/>
@@ -6072,7 +6501,7 @@
               </a:defRPr>
             </a:pPr>
             <a:r>
-              <a:t>«Compare les chiffres</a:t>
+              <a:t>«Trouve la procédure de</a:t>
             </a:r>
           </a:p>
           <a:p>
@@ -6088,7 +6517,7 @@
               </a:defRPr>
             </a:pPr>
             <a:r>
-              <a:t>de ce trimestre avec</a:t>
+              <a:t>demande d'accès pour</a:t>
             </a:r>
           </a:p>
           <a:p>
@@ -6104,7 +6533,7 @@
               </a:defRPr>
             </a:pPr>
             <a:r>
-              <a:t>ceux du rapport du</a:t>
+              <a:t>l'application X sur</a:t>
             </a:r>
           </a:p>
           <a:p>
@@ -6120,7 +6549,7 @@
               </a:defRPr>
             </a:pPr>
             <a:r>
-              <a:t>trimestre dernier dans</a:t>
+              <a:t>SharePoint et résume-la</a:t>
             </a:r>
           </a:p>
           <a:p>
@@ -6136,7 +6565,7 @@
               </a:defRPr>
             </a:pPr>
             <a:r>
-              <a:t>le dossier Partages»</a:t>
+              <a:t>en 5 étapes»</a:t>
             </a:r>
           </a:p>
           <a:p>
@@ -6165,7 +6594,7 @@
               </a:defRPr>
             </a:pPr>
             <a:r>
-              <a:t>→ Analyse deux fichiers</a:t>
+              <a:t>→ Copilot cherche dans</a:t>
             </a:r>
           </a:p>
           <a:p>
@@ -6181,7 +6610,7 @@
               </a:defRPr>
             </a:pPr>
             <a:r>
-              <a:t>   OneDrive/SharePoint,</a:t>
+              <a:t>SharePoint, lit le doc,</a:t>
             </a:r>
           </a:p>
           <a:p>
@@ -6197,21 +6626,21 @@
               </a:defRPr>
             </a:pPr>
             <a:r>
-              <a:t>   compare, résume</a:t>
-            </a:r>
-          </a:p>
-        </p:txBody>
-      </p:sp>
-      <p:sp>
-        <p:nvSpPr>
-          <p:cNvPr id="11" name="Rectangle 10"/>
+              <a:t>résume. 30 secondes!</a:t>
+            </a:r>
+          </a:p>
+        </p:txBody>
+      </p:sp>
+      <p:sp>
+        <p:nvSpPr>
+          <p:cNvPr id="10" name="Rectangle 9"/>
           <p:cNvSpPr/>
           <p:nvPr/>
         </p:nvSpPr>
         <p:spPr>
           <a:xfrm>
-            <a:off x="7772400" y="3017520"/>
-            <a:ext cx="3383280" cy="3657600"/>
+            <a:off x="4114800" y="2926080"/>
+            <a:ext cx="3383280" cy="3291840"/>
           </a:xfrm>
           <a:prstGeom prst="rect">
             <a:avLst/>
@@ -6224,6 +6653,7 @@
               <a:srgbClr val="E0E0E0"/>
             </a:solidFill>
           </a:ln>
+          <a:effectLst/>
         </p:spPr>
         <p:style>
           <a:lnRef idx="1">
@@ -6247,6 +6677,30 @@
           </a:p>
         </p:txBody>
       </p:sp>
+      <p:pic>
+        <p:nvPicPr>
+          <p:cNvPr id="11" name="Picture 10" descr="chart-bar_00874E_30.png"/>
+          <p:cNvPicPr>
+            <a:picLocks noChangeAspect="1"/>
+          </p:cNvPicPr>
+          <p:nvPr/>
+        </p:nvPicPr>
+        <p:blipFill>
+          <a:blip r:embed="rId4"/>
+          <a:stretch>
+            <a:fillRect/>
+          </a:stretch>
+        </p:blipFill>
+        <p:spPr>
+          <a:xfrm>
+            <a:off x="4370832" y="3090672"/>
+            <a:ext cx="292608" cy="292608"/>
+          </a:xfrm>
+          <a:prstGeom prst="rect">
+            <a:avLst/>
+          </a:prstGeom>
+        </p:spPr>
+      </p:pic>
       <p:sp>
         <p:nvSpPr>
           <p:cNvPr id="12" name="TextBox 11"/>
@@ -6255,8 +6709,44 @@
         </p:nvSpPr>
         <p:spPr>
           <a:xfrm>
-            <a:off x="8046720" y="3200400"/>
-            <a:ext cx="2834640" cy="457200"/>
+            <a:off x="4773168" y="3108960"/>
+            <a:ext cx="2542031" cy="457200"/>
+          </a:xfrm>
+          <a:prstGeom prst="rect">
+            <a:avLst/>
+          </a:prstGeom>
+          <a:noFill/>
+        </p:spPr>
+        <p:txBody>
+          <a:bodyPr wrap="square" lIns="45720" rIns="45720" tIns="18288" bIns="18288">
+            <a:spAutoFit/>
+          </a:bodyPr>
+          <a:lstStyle/>
+          <a:p>
+            <a:pPr algn="l">
+              <a:defRPr sz="1700" b="1">
+                <a:solidFill>
+                  <a:srgbClr val="00874E"/>
+                </a:solidFill>
+                <a:latin typeface="Calibri"/>
+              </a:defRPr>
+            </a:pPr>
+            <a:r>
+              <a:t>Scénario 2: Rapports</a:t>
+            </a:r>
+          </a:p>
+        </p:txBody>
+      </p:sp>
+      <p:sp>
+        <p:nvSpPr>
+          <p:cNvPr id="13" name="TextBox 12"/>
+          <p:cNvSpPr txBox="1"/>
+          <p:nvPr/>
+        </p:nvSpPr>
+        <p:spPr>
+          <a:xfrm>
+            <a:off x="4389120" y="3703320"/>
+            <a:ext cx="2834640" cy="2331720"/>
           </a:xfrm>
           <a:prstGeom prst="rect">
             <a:avLst/>
@@ -6269,30 +6759,264 @@
           </a:bodyPr>
           <a:lstStyle/>
           <a:p>
-            <a:pPr algn="l">
-              <a:defRPr sz="1800" b="1">
-                <a:solidFill>
-                  <a:srgbClr val="F59E0B"/>
-                </a:solidFill>
-                <a:latin typeface="Calibri"/>
-              </a:defRPr>
-            </a:pPr>
-            <a:r>
-              <a:t>📝 Scénario 3: Réunions</a:t>
-            </a:r>
-          </a:p>
-        </p:txBody>
-      </p:sp>
-      <p:sp>
-        <p:nvSpPr>
-          <p:cNvPr id="13" name="TextBox 12"/>
+            <a:pPr>
+              <a:spcAft>
+                <a:spcPts val="400"/>
+              </a:spcAft>
+              <a:defRPr sz="1300">
+                <a:solidFill>
+                  <a:srgbClr val="2B2B2B"/>
+                </a:solidFill>
+                <a:latin typeface="Calibri"/>
+              </a:defRPr>
+            </a:pPr>
+            <a:r>
+              <a:t>«Compare les chiffres</a:t>
+            </a:r>
+          </a:p>
+          <a:p>
+            <a:pPr>
+              <a:spcAft>
+                <a:spcPts val="400"/>
+              </a:spcAft>
+              <a:defRPr sz="1300">
+                <a:solidFill>
+                  <a:srgbClr val="2B2B2B"/>
+                </a:solidFill>
+                <a:latin typeface="Calibri"/>
+              </a:defRPr>
+            </a:pPr>
+            <a:r>
+              <a:t>de ce trimestre avec</a:t>
+            </a:r>
+          </a:p>
+          <a:p>
+            <a:pPr>
+              <a:spcAft>
+                <a:spcPts val="400"/>
+              </a:spcAft>
+              <a:defRPr sz="1300">
+                <a:solidFill>
+                  <a:srgbClr val="2B2B2B"/>
+                </a:solidFill>
+                <a:latin typeface="Calibri"/>
+              </a:defRPr>
+            </a:pPr>
+            <a:r>
+              <a:t>ceux du rapport du</a:t>
+            </a:r>
+          </a:p>
+          <a:p>
+            <a:pPr>
+              <a:spcAft>
+                <a:spcPts val="400"/>
+              </a:spcAft>
+              <a:defRPr sz="1300">
+                <a:solidFill>
+                  <a:srgbClr val="2B2B2B"/>
+                </a:solidFill>
+                <a:latin typeface="Calibri"/>
+              </a:defRPr>
+            </a:pPr>
+            <a:r>
+              <a:t>trimestre dernier dans</a:t>
+            </a:r>
+          </a:p>
+          <a:p>
+            <a:pPr>
+              <a:spcAft>
+                <a:spcPts val="400"/>
+              </a:spcAft>
+              <a:defRPr sz="1300">
+                <a:solidFill>
+                  <a:srgbClr val="2B2B2B"/>
+                </a:solidFill>
+                <a:latin typeface="Calibri"/>
+              </a:defRPr>
+            </a:pPr>
+            <a:r>
+              <a:t>le dossier Partages»</a:t>
+            </a:r>
+          </a:p>
+          <a:p>
+            <a:pPr>
+              <a:spcAft>
+                <a:spcPts val="400"/>
+              </a:spcAft>
+              <a:defRPr sz="1300">
+                <a:solidFill>
+                  <a:srgbClr val="2B2B2B"/>
+                </a:solidFill>
+                <a:latin typeface="Calibri"/>
+              </a:defRPr>
+            </a:pPr>
+          </a:p>
+          <a:p>
+            <a:pPr>
+              <a:spcAft>
+                <a:spcPts val="400"/>
+              </a:spcAft>
+              <a:defRPr sz="1300">
+                <a:solidFill>
+                  <a:srgbClr val="2B2B2B"/>
+                </a:solidFill>
+                <a:latin typeface="Calibri"/>
+              </a:defRPr>
+            </a:pPr>
+            <a:r>
+              <a:t>→ Analyse deux fichiers</a:t>
+            </a:r>
+          </a:p>
+          <a:p>
+            <a:pPr>
+              <a:spcAft>
+                <a:spcPts val="400"/>
+              </a:spcAft>
+              <a:defRPr sz="1300">
+                <a:solidFill>
+                  <a:srgbClr val="2B2B2B"/>
+                </a:solidFill>
+                <a:latin typeface="Calibri"/>
+              </a:defRPr>
+            </a:pPr>
+            <a:r>
+              <a:t>OneDrive/SharePoint,</a:t>
+            </a:r>
+          </a:p>
+          <a:p>
+            <a:pPr>
+              <a:spcAft>
+                <a:spcPts val="400"/>
+              </a:spcAft>
+              <a:defRPr sz="1300">
+                <a:solidFill>
+                  <a:srgbClr val="2B2B2B"/>
+                </a:solidFill>
+                <a:latin typeface="Calibri"/>
+              </a:defRPr>
+            </a:pPr>
+            <a:r>
+              <a:t>compare, résume</a:t>
+            </a:r>
+          </a:p>
+        </p:txBody>
+      </p:sp>
+      <p:sp>
+        <p:nvSpPr>
+          <p:cNvPr id="14" name="Rectangle 13"/>
+          <p:cNvSpPr/>
+          <p:nvPr/>
+        </p:nvSpPr>
+        <p:spPr>
+          <a:xfrm>
+            <a:off x="7772400" y="2926080"/>
+            <a:ext cx="3383280" cy="3291840"/>
+          </a:xfrm>
+          <a:prstGeom prst="rect">
+            <a:avLst/>
+          </a:prstGeom>
+          <a:solidFill>
+            <a:srgbClr val="FFFFFF"/>
+          </a:solidFill>
+          <a:ln>
+            <a:solidFill>
+              <a:srgbClr val="E0E0E0"/>
+            </a:solidFill>
+          </a:ln>
+          <a:effectLst/>
+        </p:spPr>
+        <p:style>
+          <a:lnRef idx="1">
+            <a:schemeClr val="accent1"/>
+          </a:lnRef>
+          <a:fillRef idx="3">
+            <a:schemeClr val="accent1"/>
+          </a:fillRef>
+          <a:effectRef idx="2">
+            <a:schemeClr val="accent1"/>
+          </a:effectRef>
+          <a:fontRef idx="minor">
+            <a:schemeClr val="lt1"/>
+          </a:fontRef>
+        </p:style>
+        <p:txBody>
+          <a:bodyPr rtlCol="0" anchor="ctr"/>
+          <a:lstStyle/>
+          <a:p>
+            <a:pPr algn="ctr"/>
+          </a:p>
+        </p:txBody>
+      </p:sp>
+      <p:pic>
+        <p:nvPicPr>
+          <p:cNvPr id="15" name="Picture 14" descr="users_F59E0B_30.png"/>
+          <p:cNvPicPr>
+            <a:picLocks noChangeAspect="1"/>
+          </p:cNvPicPr>
+          <p:nvPr/>
+        </p:nvPicPr>
+        <p:blipFill>
+          <a:blip r:embed="rId5"/>
+          <a:stretch>
+            <a:fillRect/>
+          </a:stretch>
+        </p:blipFill>
+        <p:spPr>
+          <a:xfrm>
+            <a:off x="8028431" y="3090672"/>
+            <a:ext cx="292608" cy="292608"/>
+          </a:xfrm>
+          <a:prstGeom prst="rect">
+            <a:avLst/>
+          </a:prstGeom>
+        </p:spPr>
+      </p:pic>
+      <p:sp>
+        <p:nvSpPr>
+          <p:cNvPr id="16" name="TextBox 15"/>
           <p:cNvSpPr txBox="1"/>
           <p:nvPr/>
         </p:nvSpPr>
         <p:spPr>
           <a:xfrm>
-            <a:off x="8046720" y="3657600"/>
-            <a:ext cx="2834640" cy="2743200"/>
+            <a:off x="8430767" y="3108960"/>
+            <a:ext cx="2542032" cy="457200"/>
+          </a:xfrm>
+          <a:prstGeom prst="rect">
+            <a:avLst/>
+          </a:prstGeom>
+          <a:noFill/>
+        </p:spPr>
+        <p:txBody>
+          <a:bodyPr wrap="square" lIns="45720" rIns="45720" tIns="18288" bIns="18288">
+            <a:spAutoFit/>
+          </a:bodyPr>
+          <a:lstStyle/>
+          <a:p>
+            <a:pPr algn="l">
+              <a:defRPr sz="1700" b="1">
+                <a:solidFill>
+                  <a:srgbClr val="F59E0B"/>
+                </a:solidFill>
+                <a:latin typeface="Calibri"/>
+              </a:defRPr>
+            </a:pPr>
+            <a:r>
+              <a:t>Scénario 3: Réunions</a:t>
+            </a:r>
+          </a:p>
+        </p:txBody>
+      </p:sp>
+      <p:sp>
+        <p:nvSpPr>
+          <p:cNvPr id="17" name="TextBox 16"/>
+          <p:cNvSpPr txBox="1"/>
+          <p:nvPr/>
+        </p:nvSpPr>
+        <p:spPr>
+          <a:xfrm>
+            <a:off x="8046720" y="3703320"/>
+            <a:ext cx="2834640" cy="2331720"/>
           </a:xfrm>
           <a:prstGeom prst="rect">
             <a:avLst/>
@@ -6426,7 +7150,7 @@
               </a:defRPr>
             </a:pPr>
             <a:r>
-              <a:t>   le document, liste</a:t>
+              <a:t>le document, liste</a:t>
             </a:r>
           </a:p>
           <a:p>
@@ -6442,7 +7166,123 @@
               </a:defRPr>
             </a:pPr>
             <a:r>
-              <a:t>   les action items</a:t>
+              <a:t>les action items</a:t>
+            </a:r>
+          </a:p>
+        </p:txBody>
+      </p:sp>
+      <p:sp>
+        <p:nvSpPr>
+          <p:cNvPr id="18" name="Rectangle 17"/>
+          <p:cNvSpPr/>
+          <p:nvPr/>
+        </p:nvSpPr>
+        <p:spPr>
+          <a:xfrm>
+            <a:off x="457200" y="6446520"/>
+            <a:ext cx="11274552" cy="13716"/>
+          </a:xfrm>
+          <a:prstGeom prst="rect">
+            <a:avLst/>
+          </a:prstGeom>
+          <a:solidFill>
+            <a:srgbClr val="00874E"/>
+          </a:solidFill>
+          <a:ln>
+            <a:noFill/>
+          </a:ln>
+          <a:effectLst/>
+        </p:spPr>
+        <p:style>
+          <a:lnRef idx="1">
+            <a:schemeClr val="accent1"/>
+          </a:lnRef>
+          <a:fillRef idx="3">
+            <a:schemeClr val="accent1"/>
+          </a:fillRef>
+          <a:effectRef idx="2">
+            <a:schemeClr val="accent1"/>
+          </a:effectRef>
+          <a:fontRef idx="minor">
+            <a:schemeClr val="lt1"/>
+          </a:fontRef>
+        </p:style>
+        <p:txBody>
+          <a:bodyPr rtlCol="0" anchor="ctr"/>
+          <a:lstStyle/>
+          <a:p>
+            <a:pPr algn="ctr"/>
+          </a:p>
+        </p:txBody>
+      </p:sp>
+      <p:sp>
+        <p:nvSpPr>
+          <p:cNvPr id="19" name="TextBox 18"/>
+          <p:cNvSpPr txBox="1"/>
+          <p:nvPr/>
+        </p:nvSpPr>
+        <p:spPr>
+          <a:xfrm>
+            <a:off x="457200" y="6537960"/>
+            <a:ext cx="5486400" cy="274320"/>
+          </a:xfrm>
+          <a:prstGeom prst="rect">
+            <a:avLst/>
+          </a:prstGeom>
+          <a:noFill/>
+        </p:spPr>
+        <p:txBody>
+          <a:bodyPr wrap="square" lIns="45720" rIns="45720" tIns="18288" bIns="18288">
+            <a:spAutoFit/>
+          </a:bodyPr>
+          <a:lstStyle/>
+          <a:p>
+            <a:pPr algn="l">
+              <a:defRPr sz="1000" b="0">
+                <a:solidFill>
+                  <a:srgbClr val="6B6B6B"/>
+                </a:solidFill>
+                <a:latin typeface="Calibri"/>
+              </a:defRPr>
+            </a:pPr>
+            <a:r>
+              <a:t>La minute Copilot</a:t>
+            </a:r>
+          </a:p>
+        </p:txBody>
+      </p:sp>
+      <p:sp>
+        <p:nvSpPr>
+          <p:cNvPr id="20" name="TextBox 19"/>
+          <p:cNvSpPr txBox="1"/>
+          <p:nvPr/>
+        </p:nvSpPr>
+        <p:spPr>
+          <a:xfrm>
+            <a:off x="10972800" y="6537960"/>
+            <a:ext cx="822960" cy="274320"/>
+          </a:xfrm>
+          <a:prstGeom prst="rect">
+            <a:avLst/>
+          </a:prstGeom>
+          <a:noFill/>
+        </p:spPr>
+        <p:txBody>
+          <a:bodyPr wrap="square" lIns="45720" rIns="45720" tIns="18288" bIns="18288">
+            <a:spAutoFit/>
+          </a:bodyPr>
+          <a:lstStyle/>
+          <a:p>
+            <a:pPr algn="r">
+              <a:defRPr sz="1000" b="0">
+                <a:solidFill>
+                  <a:srgbClr val="6B6B6B"/>
+                </a:solidFill>
+                <a:latin typeface="Calibri"/>
+              </a:defRPr>
+            </a:pPr>
+            <a:r>
+              <a:t>4</a:t>
             </a:r>
           </a:p>
         </p:txBody>
@@ -6461,7 +7301,7 @@
     <p:bg>
       <p:bgPr>
         <a:solidFill>
-          <a:srgbClr val="F0F4F8"/>
+          <a:srgbClr val="E6F0EA"/>
         </a:solidFill>
         <a:effectLst/>
       </p:bgPr>
@@ -6481,8 +7321,8 @@
         </p:nvSpPr>
         <p:spPr>
           <a:xfrm>
-            <a:off x="457200" y="274320"/>
-            <a:ext cx="10972800" cy="640080"/>
+            <a:off x="457200" y="365760"/>
+            <a:ext cx="10972800" cy="731520"/>
           </a:xfrm>
           <a:prstGeom prst="rect">
             <a:avLst/>
@@ -6490,21 +7330,21 @@
           <a:noFill/>
         </p:spPr>
         <p:txBody>
-          <a:bodyPr wrap="square">
+          <a:bodyPr wrap="square" lIns="45720" rIns="45720" tIns="18288" bIns="18288">
             <a:spAutoFit/>
           </a:bodyPr>
           <a:lstStyle/>
           <a:p>
             <a:pPr algn="l">
-              <a:defRPr sz="3200" b="1">
-                <a:solidFill>
-                  <a:srgbClr val="2B2B2B"/>
-                </a:solidFill>
-                <a:latin typeface="Calibri"/>
-              </a:defRPr>
-            </a:pPr>
-            <a:r>
-              <a:t>💡 Comment bien utiliser le contexte</a:t>
+              <a:defRPr sz="2800" b="1">
+                <a:solidFill>
+                  <a:srgbClr val="006B3F"/>
+                </a:solidFill>
+                <a:latin typeface="Calibri"/>
+              </a:defRPr>
+            </a:pPr>
+            <a:r>
+              <a:t>Comment bien utiliser le contexte</a:t>
             </a:r>
           </a:p>
         </p:txBody>
@@ -6517,20 +7357,19 @@
         </p:nvSpPr>
         <p:spPr>
           <a:xfrm>
-            <a:off x="457200" y="1188720"/>
-            <a:ext cx="3383280" cy="5029200"/>
+            <a:off x="457200" y="1234440"/>
+            <a:ext cx="11274552" cy="18288"/>
           </a:xfrm>
           <a:prstGeom prst="rect">
             <a:avLst/>
           </a:prstGeom>
           <a:solidFill>
-            <a:srgbClr val="FFFFFF"/>
+            <a:srgbClr val="00874E"/>
           </a:solidFill>
           <a:ln>
-            <a:solidFill>
-              <a:srgbClr val="E0E0E0"/>
-            </a:solidFill>
+            <a:noFill/>
           </a:ln>
+          <a:effectLst/>
         </p:spPr>
         <p:style>
           <a:lnRef idx="1">
@@ -6556,198 +7395,14 @@
       </p:sp>
       <p:sp>
         <p:nvSpPr>
-          <p:cNvPr id="4" name="TextBox 3"/>
-          <p:cNvSpPr txBox="1"/>
-          <p:nvPr/>
-        </p:nvSpPr>
-        <p:spPr>
-          <a:xfrm>
-            <a:off x="731520" y="1371600"/>
-            <a:ext cx="2834640" cy="457200"/>
-          </a:xfrm>
-          <a:prstGeom prst="rect">
-            <a:avLst/>
-          </a:prstGeom>
-          <a:noFill/>
-        </p:spPr>
-        <p:txBody>
-          <a:bodyPr wrap="square">
-            <a:spAutoFit/>
-          </a:bodyPr>
-          <a:lstStyle/>
-          <a:p>
-            <a:pPr algn="l">
-              <a:defRPr sz="1800" b="1">
-                <a:solidFill>
-                  <a:srgbClr val="10B981"/>
-                </a:solidFill>
-                <a:latin typeface="Calibri"/>
-              </a:defRPr>
-            </a:pPr>
-            <a:r>
-              <a:t>✅ Bon prompt</a:t>
-            </a:r>
-          </a:p>
-        </p:txBody>
-      </p:sp>
-      <p:sp>
-        <p:nvSpPr>
-          <p:cNvPr id="5" name="TextBox 4"/>
-          <p:cNvSpPr txBox="1"/>
-          <p:nvPr/>
-        </p:nvSpPr>
-        <p:spPr>
-          <a:xfrm>
-            <a:off x="731520" y="1828800"/>
-            <a:ext cx="2834640" cy="4114800"/>
-          </a:xfrm>
-          <a:prstGeom prst="rect">
-            <a:avLst/>
-          </a:prstGeom>
-          <a:noFill/>
-        </p:spPr>
-        <p:txBody>
-          <a:bodyPr wrap="square">
-            <a:spAutoFit/>
-          </a:bodyPr>
-          <a:lstStyle/>
-          <a:p>
-            <a:pPr>
-              <a:spcAft>
-                <a:spcPts val="400"/>
-              </a:spcAft>
-              <a:defRPr sz="1300">
-                <a:solidFill>
-                  <a:srgbClr val="2B2B2B"/>
-                </a:solidFill>
-                <a:latin typeface="Calibri"/>
-              </a:defRPr>
-            </a:pPr>
-            <a:r>
-              <a:t>«Dans le site SharePoint</a:t>
-            </a:r>
-          </a:p>
-          <a:p>
-            <a:pPr>
-              <a:spcAft>
-                <a:spcPts val="400"/>
-              </a:spcAft>
-              <a:defRPr sz="1300">
-                <a:solidFill>
-                  <a:srgbClr val="2B2B2B"/>
-                </a:solidFill>
-                <a:latin typeface="Calibri"/>
-              </a:defRPr>
-            </a:pPr>
-            <a:r>
-              <a:t>Informatique, résume</a:t>
-            </a:r>
-          </a:p>
-          <a:p>
-            <a:pPr>
-              <a:spcAft>
-                <a:spcPts val="400"/>
-              </a:spcAft>
-              <a:defRPr sz="1300">
-                <a:solidFill>
-                  <a:srgbClr val="2B2B2B"/>
-                </a:solidFill>
-                <a:latin typeface="Calibri"/>
-              </a:defRPr>
-            </a:pPr>
-            <a:r>
-              <a:t>le document Politique</a:t>
-            </a:r>
-          </a:p>
-          <a:p>
-            <a:pPr>
-              <a:spcAft>
-                <a:spcPts val="400"/>
-              </a:spcAft>
-              <a:defRPr sz="1300">
-                <a:solidFill>
-                  <a:srgbClr val="2B2B2B"/>
-                </a:solidFill>
-                <a:latin typeface="Calibri"/>
-              </a:defRPr>
-            </a:pPr>
-            <a:r>
-              <a:t>de sécurité 2026 en</a:t>
-            </a:r>
-          </a:p>
-          <a:p>
-            <a:pPr>
-              <a:spcAft>
-                <a:spcPts val="400"/>
-              </a:spcAft>
-              <a:defRPr sz="1300">
-                <a:solidFill>
-                  <a:srgbClr val="2B2B2B"/>
-                </a:solidFill>
-                <a:latin typeface="Calibri"/>
-              </a:defRPr>
-            </a:pPr>
-            <a:r>
-              <a:t>3 points.»</a:t>
-            </a:r>
-          </a:p>
-          <a:p>
-            <a:pPr>
-              <a:spcAft>
-                <a:spcPts val="400"/>
-              </a:spcAft>
-              <a:defRPr sz="1300">
-                <a:solidFill>
-                  <a:srgbClr val="2B2B2B"/>
-                </a:solidFill>
-                <a:latin typeface="Calibri"/>
-              </a:defRPr>
-            </a:pPr>
-          </a:p>
-          <a:p>
-            <a:pPr>
-              <a:spcAft>
-                <a:spcPts val="400"/>
-              </a:spcAft>
-              <a:defRPr sz="1300">
-                <a:solidFill>
-                  <a:srgbClr val="2B2B2B"/>
-                </a:solidFill>
-                <a:latin typeface="Calibri"/>
-              </a:defRPr>
-            </a:pPr>
-            <a:r>
-              <a:t>→ Copilot sait où</a:t>
-            </a:r>
-          </a:p>
-          <a:p>
-            <a:pPr>
-              <a:spcAft>
-                <a:spcPts val="400"/>
-              </a:spcAft>
-              <a:defRPr sz="1300">
-                <a:solidFill>
-                  <a:srgbClr val="2B2B2B"/>
-                </a:solidFill>
-                <a:latin typeface="Calibri"/>
-              </a:defRPr>
-            </a:pPr>
-            <a:r>
-              <a:t>   chercher!</a:t>
-            </a:r>
-          </a:p>
-        </p:txBody>
-      </p:sp>
-      <p:sp>
-        <p:nvSpPr>
-          <p:cNvPr id="6" name="Rectangle 5"/>
+          <p:cNvPr id="4" name="Rectangle 3"/>
           <p:cNvSpPr/>
           <p:nvPr/>
         </p:nvSpPr>
         <p:spPr>
           <a:xfrm>
-            <a:off x="4114800" y="1188720"/>
-            <a:ext cx="3383280" cy="5029200"/>
+            <a:off x="457200" y="1463040"/>
+            <a:ext cx="3383280" cy="4754880"/>
           </a:xfrm>
           <a:prstGeom prst="rect">
             <a:avLst/>
@@ -6760,6 +7415,7 @@
               <a:srgbClr val="E0E0E0"/>
             </a:solidFill>
           </a:ln>
+          <a:effectLst/>
         </p:spPr>
         <p:style>
           <a:lnRef idx="1">
@@ -6783,6 +7439,66 @@
           </a:p>
         </p:txBody>
       </p:sp>
+      <p:pic>
+        <p:nvPicPr>
+          <p:cNvPr id="5" name="Picture 4" descr="circle-check_00874E_30.png"/>
+          <p:cNvPicPr>
+            <a:picLocks noChangeAspect="1"/>
+          </p:cNvPicPr>
+          <p:nvPr/>
+        </p:nvPicPr>
+        <p:blipFill>
+          <a:blip r:embed="rId3"/>
+          <a:stretch>
+            <a:fillRect/>
+          </a:stretch>
+        </p:blipFill>
+        <p:spPr>
+          <a:xfrm>
+            <a:off x="713232" y="1627632"/>
+            <a:ext cx="292608" cy="292608"/>
+          </a:xfrm>
+          <a:prstGeom prst="rect">
+            <a:avLst/>
+          </a:prstGeom>
+        </p:spPr>
+      </p:pic>
+      <p:sp>
+        <p:nvSpPr>
+          <p:cNvPr id="6" name="TextBox 5"/>
+          <p:cNvSpPr txBox="1"/>
+          <p:nvPr/>
+        </p:nvSpPr>
+        <p:spPr>
+          <a:xfrm>
+            <a:off x="1115568" y="1645920"/>
+            <a:ext cx="2542032" cy="457200"/>
+          </a:xfrm>
+          <a:prstGeom prst="rect">
+            <a:avLst/>
+          </a:prstGeom>
+          <a:noFill/>
+        </p:spPr>
+        <p:txBody>
+          <a:bodyPr wrap="square" lIns="45720" rIns="45720" tIns="18288" bIns="18288">
+            <a:spAutoFit/>
+          </a:bodyPr>
+          <a:lstStyle/>
+          <a:p>
+            <a:pPr algn="l">
+              <a:defRPr sz="1700" b="1">
+                <a:solidFill>
+                  <a:srgbClr val="00874E"/>
+                </a:solidFill>
+                <a:latin typeface="Calibri"/>
+              </a:defRPr>
+            </a:pPr>
+            <a:r>
+              <a:t>Bon prompt</a:t>
+            </a:r>
+          </a:p>
+        </p:txBody>
+      </p:sp>
       <p:sp>
         <p:nvSpPr>
           <p:cNvPr id="7" name="TextBox 6"/>
@@ -6791,8 +7507,8 @@
         </p:nvSpPr>
         <p:spPr>
           <a:xfrm>
-            <a:off x="4389120" y="1371600"/>
-            <a:ext cx="2834640" cy="457200"/>
+            <a:off x="731520" y="2240280"/>
+            <a:ext cx="2834640" cy="3794760"/>
           </a:xfrm>
           <a:prstGeom prst="rect">
             <a:avLst/>
@@ -6805,42 +7521,6 @@
           </a:bodyPr>
           <a:lstStyle/>
           <a:p>
-            <a:pPr algn="l">
-              <a:defRPr sz="1800" b="1">
-                <a:solidFill>
-                  <a:srgbClr val="EF4444"/>
-                </a:solidFill>
-                <a:latin typeface="Calibri"/>
-              </a:defRPr>
-            </a:pPr>
-            <a:r>
-              <a:t>❌ Prompt vague</a:t>
-            </a:r>
-          </a:p>
-        </p:txBody>
-      </p:sp>
-      <p:sp>
-        <p:nvSpPr>
-          <p:cNvPr id="8" name="TextBox 7"/>
-          <p:cNvSpPr txBox="1"/>
-          <p:nvPr/>
-        </p:nvSpPr>
-        <p:spPr>
-          <a:xfrm>
-            <a:off x="4389120" y="1828800"/>
-            <a:ext cx="2834640" cy="4114800"/>
-          </a:xfrm>
-          <a:prstGeom prst="rect">
-            <a:avLst/>
-          </a:prstGeom>
-          <a:noFill/>
-        </p:spPr>
-        <p:txBody>
-          <a:bodyPr wrap="square">
-            <a:spAutoFit/>
-          </a:bodyPr>
-          <a:lstStyle/>
-          <a:p>
             <a:pPr>
               <a:spcAft>
                 <a:spcPts val="400"/>
@@ -6853,7 +7533,7 @@
               </a:defRPr>
             </a:pPr>
             <a:r>
-              <a:t>«Trouve la politique</a:t>
+              <a:t>«Dans le site SharePoint</a:t>
             </a:r>
           </a:p>
           <a:p>
@@ -6869,7 +7549,7 @@
               </a:defRPr>
             </a:pPr>
             <a:r>
-              <a:t>de sécurité.»</a:t>
+              <a:t>Informatique, résume</a:t>
             </a:r>
           </a:p>
           <a:p>
@@ -6884,6 +7564,9 @@
                 <a:latin typeface="Calibri"/>
               </a:defRPr>
             </a:pPr>
+            <a:r>
+              <a:t>le document Politique</a:t>
+            </a:r>
           </a:p>
           <a:p>
             <a:pPr>
@@ -6898,7 +7581,7 @@
               </a:defRPr>
             </a:pPr>
             <a:r>
-              <a:t>→ Copilot ne sait pas</a:t>
+              <a:t>de sécurité 2026 en</a:t>
             </a:r>
           </a:p>
           <a:p>
@@ -6914,7 +7597,7 @@
               </a:defRPr>
             </a:pPr>
             <a:r>
-              <a:t>   où chercher. Il va</a:t>
+              <a:t>3 points.»</a:t>
             </a:r>
           </a:p>
           <a:p>
@@ -6929,9 +7612,6 @@
                 <a:latin typeface="Calibri"/>
               </a:defRPr>
             </a:pPr>
-            <a:r>
-              <a:t>   chercher partout ou</a:t>
-            </a:r>
           </a:p>
           <a:p>
             <a:pPr>
@@ -6946,7 +7626,7 @@
               </a:defRPr>
             </a:pPr>
             <a:r>
-              <a:t>   répondre de façon</a:t>
+              <a:t>→ Copilot sait où</a:t>
             </a:r>
           </a:p>
           <a:p>
@@ -6962,21 +7642,21 @@
               </a:defRPr>
             </a:pPr>
             <a:r>
-              <a:t>   générique.</a:t>
-            </a:r>
-          </a:p>
-        </p:txBody>
-      </p:sp>
-      <p:sp>
-        <p:nvSpPr>
-          <p:cNvPr id="9" name="Rectangle 8"/>
+              <a:t>chercher!</a:t>
+            </a:r>
+          </a:p>
+        </p:txBody>
+      </p:sp>
+      <p:sp>
+        <p:nvSpPr>
+          <p:cNvPr id="8" name="Rectangle 7"/>
           <p:cNvSpPr/>
           <p:nvPr/>
         </p:nvSpPr>
         <p:spPr>
           <a:xfrm>
-            <a:off x="7772400" y="1188720"/>
-            <a:ext cx="3383280" cy="5029200"/>
+            <a:off x="4114800" y="1463040"/>
+            <a:ext cx="3383280" cy="4754880"/>
           </a:xfrm>
           <a:prstGeom prst="rect">
             <a:avLst/>
@@ -6989,6 +7669,7 @@
               <a:srgbClr val="E0E0E0"/>
             </a:solidFill>
           </a:ln>
+          <a:effectLst/>
         </p:spPr>
         <p:style>
           <a:lnRef idx="1">
@@ -7012,6 +7693,30 @@
           </a:p>
         </p:txBody>
       </p:sp>
+      <p:pic>
+        <p:nvPicPr>
+          <p:cNvPr id="9" name="Picture 8" descr="circle-help_EF4444_30.png"/>
+          <p:cNvPicPr>
+            <a:picLocks noChangeAspect="1"/>
+          </p:cNvPicPr>
+          <p:nvPr/>
+        </p:nvPicPr>
+        <p:blipFill>
+          <a:blip r:embed="rId4"/>
+          <a:stretch>
+            <a:fillRect/>
+          </a:stretch>
+        </p:blipFill>
+        <p:spPr>
+          <a:xfrm>
+            <a:off x="4370832" y="1627632"/>
+            <a:ext cx="292608" cy="292608"/>
+          </a:xfrm>
+          <a:prstGeom prst="rect">
+            <a:avLst/>
+          </a:prstGeom>
+        </p:spPr>
+      </p:pic>
       <p:sp>
         <p:nvSpPr>
           <p:cNvPr id="10" name="TextBox 9"/>
@@ -7020,8 +7725,44 @@
         </p:nvSpPr>
         <p:spPr>
           <a:xfrm>
-            <a:off x="8046720" y="1371600"/>
-            <a:ext cx="2834640" cy="457200"/>
+            <a:off x="4773168" y="1645920"/>
+            <a:ext cx="2542031" cy="457200"/>
+          </a:xfrm>
+          <a:prstGeom prst="rect">
+            <a:avLst/>
+          </a:prstGeom>
+          <a:noFill/>
+        </p:spPr>
+        <p:txBody>
+          <a:bodyPr wrap="square" lIns="45720" rIns="45720" tIns="18288" bIns="18288">
+            <a:spAutoFit/>
+          </a:bodyPr>
+          <a:lstStyle/>
+          <a:p>
+            <a:pPr algn="l">
+              <a:defRPr sz="1700" b="1">
+                <a:solidFill>
+                  <a:srgbClr val="EF4444"/>
+                </a:solidFill>
+                <a:latin typeface="Calibri"/>
+              </a:defRPr>
+            </a:pPr>
+            <a:r>
+              <a:t>Prompt vague</a:t>
+            </a:r>
+          </a:p>
+        </p:txBody>
+      </p:sp>
+      <p:sp>
+        <p:nvSpPr>
+          <p:cNvPr id="11" name="TextBox 10"/>
+          <p:cNvSpPr txBox="1"/>
+          <p:nvPr/>
+        </p:nvSpPr>
+        <p:spPr>
+          <a:xfrm>
+            <a:off x="4389120" y="2240280"/>
+            <a:ext cx="2834640" cy="3794760"/>
           </a:xfrm>
           <a:prstGeom prst="rect">
             <a:avLst/>
@@ -7034,30 +7775,248 @@
           </a:bodyPr>
           <a:lstStyle/>
           <a:p>
-            <a:pPr algn="l">
-              <a:defRPr sz="1800" b="1">
-                <a:solidFill>
-                  <a:srgbClr val="0078D4"/>
-                </a:solidFill>
-                <a:latin typeface="Calibri"/>
-              </a:defRPr>
-            </a:pPr>
-            <a:r>
-              <a:t>💡 Rappel sécurité</a:t>
-            </a:r>
-          </a:p>
-        </p:txBody>
-      </p:sp>
-      <p:sp>
-        <p:nvSpPr>
-          <p:cNvPr id="11" name="TextBox 10"/>
+            <a:pPr>
+              <a:spcAft>
+                <a:spcPts val="400"/>
+              </a:spcAft>
+              <a:defRPr sz="1300">
+                <a:solidFill>
+                  <a:srgbClr val="2B2B2B"/>
+                </a:solidFill>
+                <a:latin typeface="Calibri"/>
+              </a:defRPr>
+            </a:pPr>
+            <a:r>
+              <a:t>«Trouve la politique</a:t>
+            </a:r>
+          </a:p>
+          <a:p>
+            <a:pPr>
+              <a:spcAft>
+                <a:spcPts val="400"/>
+              </a:spcAft>
+              <a:defRPr sz="1300">
+                <a:solidFill>
+                  <a:srgbClr val="2B2B2B"/>
+                </a:solidFill>
+                <a:latin typeface="Calibri"/>
+              </a:defRPr>
+            </a:pPr>
+            <a:r>
+              <a:t>de sécurité.»</a:t>
+            </a:r>
+          </a:p>
+          <a:p>
+            <a:pPr>
+              <a:spcAft>
+                <a:spcPts val="400"/>
+              </a:spcAft>
+              <a:defRPr sz="1300">
+                <a:solidFill>
+                  <a:srgbClr val="2B2B2B"/>
+                </a:solidFill>
+                <a:latin typeface="Calibri"/>
+              </a:defRPr>
+            </a:pPr>
+          </a:p>
+          <a:p>
+            <a:pPr>
+              <a:spcAft>
+                <a:spcPts val="400"/>
+              </a:spcAft>
+              <a:defRPr sz="1300">
+                <a:solidFill>
+                  <a:srgbClr val="2B2B2B"/>
+                </a:solidFill>
+                <a:latin typeface="Calibri"/>
+              </a:defRPr>
+            </a:pPr>
+            <a:r>
+              <a:t>→ Copilot ne sait pas</a:t>
+            </a:r>
+          </a:p>
+          <a:p>
+            <a:pPr>
+              <a:spcAft>
+                <a:spcPts val="400"/>
+              </a:spcAft>
+              <a:defRPr sz="1300">
+                <a:solidFill>
+                  <a:srgbClr val="2B2B2B"/>
+                </a:solidFill>
+                <a:latin typeface="Calibri"/>
+              </a:defRPr>
+            </a:pPr>
+            <a:r>
+              <a:t>où chercher. Il va</a:t>
+            </a:r>
+          </a:p>
+          <a:p>
+            <a:pPr>
+              <a:spcAft>
+                <a:spcPts val="400"/>
+              </a:spcAft>
+              <a:defRPr sz="1300">
+                <a:solidFill>
+                  <a:srgbClr val="2B2B2B"/>
+                </a:solidFill>
+                <a:latin typeface="Calibri"/>
+              </a:defRPr>
+            </a:pPr>
+            <a:r>
+              <a:t>chercher partout ou</a:t>
+            </a:r>
+          </a:p>
+          <a:p>
+            <a:pPr>
+              <a:spcAft>
+                <a:spcPts val="400"/>
+              </a:spcAft>
+              <a:defRPr sz="1300">
+                <a:solidFill>
+                  <a:srgbClr val="2B2B2B"/>
+                </a:solidFill>
+                <a:latin typeface="Calibri"/>
+              </a:defRPr>
+            </a:pPr>
+            <a:r>
+              <a:t>répondre de façon</a:t>
+            </a:r>
+          </a:p>
+          <a:p>
+            <a:pPr>
+              <a:spcAft>
+                <a:spcPts val="400"/>
+              </a:spcAft>
+              <a:defRPr sz="1300">
+                <a:solidFill>
+                  <a:srgbClr val="2B2B2B"/>
+                </a:solidFill>
+                <a:latin typeface="Calibri"/>
+              </a:defRPr>
+            </a:pPr>
+            <a:r>
+              <a:t>générique.</a:t>
+            </a:r>
+          </a:p>
+        </p:txBody>
+      </p:sp>
+      <p:sp>
+        <p:nvSpPr>
+          <p:cNvPr id="12" name="Rectangle 11"/>
+          <p:cNvSpPr/>
+          <p:nvPr/>
+        </p:nvSpPr>
+        <p:spPr>
+          <a:xfrm>
+            <a:off x="7772400" y="1463040"/>
+            <a:ext cx="3383280" cy="4754880"/>
+          </a:xfrm>
+          <a:prstGeom prst="rect">
+            <a:avLst/>
+          </a:prstGeom>
+          <a:solidFill>
+            <a:srgbClr val="FFFFFF"/>
+          </a:solidFill>
+          <a:ln>
+            <a:solidFill>
+              <a:srgbClr val="E0E0E0"/>
+            </a:solidFill>
+          </a:ln>
+          <a:effectLst/>
+        </p:spPr>
+        <p:style>
+          <a:lnRef idx="1">
+            <a:schemeClr val="accent1"/>
+          </a:lnRef>
+          <a:fillRef idx="3">
+            <a:schemeClr val="accent1"/>
+          </a:fillRef>
+          <a:effectRef idx="2">
+            <a:schemeClr val="accent1"/>
+          </a:effectRef>
+          <a:fontRef idx="minor">
+            <a:schemeClr val="lt1"/>
+          </a:fontRef>
+        </p:style>
+        <p:txBody>
+          <a:bodyPr rtlCol="0" anchor="ctr"/>
+          <a:lstStyle/>
+          <a:p>
+            <a:pPr algn="ctr"/>
+          </a:p>
+        </p:txBody>
+      </p:sp>
+      <p:pic>
+        <p:nvPicPr>
+          <p:cNvPr id="13" name="Picture 12" descr="shield-alert_00874E_30.png"/>
+          <p:cNvPicPr>
+            <a:picLocks noChangeAspect="1"/>
+          </p:cNvPicPr>
+          <p:nvPr/>
+        </p:nvPicPr>
+        <p:blipFill>
+          <a:blip r:embed="rId5"/>
+          <a:stretch>
+            <a:fillRect/>
+          </a:stretch>
+        </p:blipFill>
+        <p:spPr>
+          <a:xfrm>
+            <a:off x="8028431" y="1627632"/>
+            <a:ext cx="292608" cy="292608"/>
+          </a:xfrm>
+          <a:prstGeom prst="rect">
+            <a:avLst/>
+          </a:prstGeom>
+        </p:spPr>
+      </p:pic>
+      <p:sp>
+        <p:nvSpPr>
+          <p:cNvPr id="14" name="TextBox 13"/>
           <p:cNvSpPr txBox="1"/>
           <p:nvPr/>
         </p:nvSpPr>
         <p:spPr>
           <a:xfrm>
-            <a:off x="8046720" y="1828800"/>
-            <a:ext cx="2834640" cy="4114800"/>
+            <a:off x="8430767" y="1645920"/>
+            <a:ext cx="2542032" cy="457200"/>
+          </a:xfrm>
+          <a:prstGeom prst="rect">
+            <a:avLst/>
+          </a:prstGeom>
+          <a:noFill/>
+        </p:spPr>
+        <p:txBody>
+          <a:bodyPr wrap="square" lIns="45720" rIns="45720" tIns="18288" bIns="18288">
+            <a:spAutoFit/>
+          </a:bodyPr>
+          <a:lstStyle/>
+          <a:p>
+            <a:pPr algn="l">
+              <a:defRPr sz="1700" b="1">
+                <a:solidFill>
+                  <a:srgbClr val="00874E"/>
+                </a:solidFill>
+                <a:latin typeface="Calibri"/>
+              </a:defRPr>
+            </a:pPr>
+            <a:r>
+              <a:t>Rappel sécurité</a:t>
+            </a:r>
+          </a:p>
+        </p:txBody>
+      </p:sp>
+      <p:sp>
+        <p:nvSpPr>
+          <p:cNvPr id="15" name="TextBox 14"/>
+          <p:cNvSpPr txBox="1"/>
+          <p:nvPr/>
+        </p:nvSpPr>
+        <p:spPr>
+          <a:xfrm>
+            <a:off x="8046720" y="2240280"/>
+            <a:ext cx="2834640" cy="3794760"/>
           </a:xfrm>
           <a:prstGeom prst="rect">
             <a:avLst/>
@@ -7189,6 +8148,122 @@
             </a:pPr>
             <a:r>
               <a:t>le tenant M365.</a:t>
+            </a:r>
+          </a:p>
+        </p:txBody>
+      </p:sp>
+      <p:sp>
+        <p:nvSpPr>
+          <p:cNvPr id="16" name="Rectangle 15"/>
+          <p:cNvSpPr/>
+          <p:nvPr/>
+        </p:nvSpPr>
+        <p:spPr>
+          <a:xfrm>
+            <a:off x="457200" y="6446520"/>
+            <a:ext cx="11274552" cy="13716"/>
+          </a:xfrm>
+          <a:prstGeom prst="rect">
+            <a:avLst/>
+          </a:prstGeom>
+          <a:solidFill>
+            <a:srgbClr val="00874E"/>
+          </a:solidFill>
+          <a:ln>
+            <a:noFill/>
+          </a:ln>
+          <a:effectLst/>
+        </p:spPr>
+        <p:style>
+          <a:lnRef idx="1">
+            <a:schemeClr val="accent1"/>
+          </a:lnRef>
+          <a:fillRef idx="3">
+            <a:schemeClr val="accent1"/>
+          </a:fillRef>
+          <a:effectRef idx="2">
+            <a:schemeClr val="accent1"/>
+          </a:effectRef>
+          <a:fontRef idx="minor">
+            <a:schemeClr val="lt1"/>
+          </a:fontRef>
+        </p:style>
+        <p:txBody>
+          <a:bodyPr rtlCol="0" anchor="ctr"/>
+          <a:lstStyle/>
+          <a:p>
+            <a:pPr algn="ctr"/>
+          </a:p>
+        </p:txBody>
+      </p:sp>
+      <p:sp>
+        <p:nvSpPr>
+          <p:cNvPr id="17" name="TextBox 16"/>
+          <p:cNvSpPr txBox="1"/>
+          <p:nvPr/>
+        </p:nvSpPr>
+        <p:spPr>
+          <a:xfrm>
+            <a:off x="457200" y="6537960"/>
+            <a:ext cx="5486400" cy="274320"/>
+          </a:xfrm>
+          <a:prstGeom prst="rect">
+            <a:avLst/>
+          </a:prstGeom>
+          <a:noFill/>
+        </p:spPr>
+        <p:txBody>
+          <a:bodyPr wrap="square" lIns="45720" rIns="45720" tIns="18288" bIns="18288">
+            <a:spAutoFit/>
+          </a:bodyPr>
+          <a:lstStyle/>
+          <a:p>
+            <a:pPr algn="l">
+              <a:defRPr sz="1000" b="0">
+                <a:solidFill>
+                  <a:srgbClr val="6B6B6B"/>
+                </a:solidFill>
+                <a:latin typeface="Calibri"/>
+              </a:defRPr>
+            </a:pPr>
+            <a:r>
+              <a:t>La minute Copilot</a:t>
+            </a:r>
+          </a:p>
+        </p:txBody>
+      </p:sp>
+      <p:sp>
+        <p:nvSpPr>
+          <p:cNvPr id="18" name="TextBox 17"/>
+          <p:cNvSpPr txBox="1"/>
+          <p:nvPr/>
+        </p:nvSpPr>
+        <p:spPr>
+          <a:xfrm>
+            <a:off x="10972800" y="6537960"/>
+            <a:ext cx="822960" cy="274320"/>
+          </a:xfrm>
+          <a:prstGeom prst="rect">
+            <a:avLst/>
+          </a:prstGeom>
+          <a:noFill/>
+        </p:spPr>
+        <p:txBody>
+          <a:bodyPr wrap="square" lIns="45720" rIns="45720" tIns="18288" bIns="18288">
+            <a:spAutoFit/>
+          </a:bodyPr>
+          <a:lstStyle/>
+          <a:p>
+            <a:pPr algn="r">
+              <a:defRPr sz="1000" b="0">
+                <a:solidFill>
+                  <a:srgbClr val="6B6B6B"/>
+                </a:solidFill>
+                <a:latin typeface="Calibri"/>
+              </a:defRPr>
+            </a:pPr>
+            <a:r>
+              <a:t>5</a:t>
             </a:r>
           </a:p>
         </p:txBody>
@@ -7207,7 +8282,7 @@
     <p:bg>
       <p:bgPr>
         <a:solidFill>
-          <a:srgbClr val="0078D4"/>
+          <a:srgbClr val="00874E"/>
         </a:solidFill>
         <a:effectLst/>
       </p:bgPr>
@@ -7227,8 +8302,8 @@
         </p:nvSpPr>
         <p:spPr>
           <a:xfrm>
-            <a:off x="914400" y="914400"/>
-            <a:ext cx="10058400" cy="731520"/>
+            <a:off x="914400" y="731520"/>
+            <a:ext cx="10360152" cy="822960"/>
           </a:xfrm>
           <a:prstGeom prst="rect">
             <a:avLst/>
@@ -7236,13 +8311,13 @@
           <a:noFill/>
         </p:spPr>
         <p:txBody>
-          <a:bodyPr wrap="square">
+          <a:bodyPr wrap="square" lIns="45720" rIns="45720" tIns="18288" bIns="18288">
             <a:spAutoFit/>
           </a:bodyPr>
           <a:lstStyle/>
           <a:p>
             <a:pPr algn="ctr">
-              <a:defRPr sz="4000" b="1">
+              <a:defRPr sz="3600" b="1">
                 <a:solidFill>
                   <a:srgbClr val="FFFFFF"/>
                 </a:solidFill>
@@ -7250,7 +8325,7 @@
               </a:defRPr>
             </a:pPr>
             <a:r>
-              <a:t>🎯 À retenir</a:t>
+              <a:t>À retenir</a:t>
             </a:r>
           </a:p>
         </p:txBody>
@@ -7263,8 +8338,8 @@
         </p:nvSpPr>
         <p:spPr>
           <a:xfrm>
-            <a:off x="365760" y="2011680"/>
-            <a:ext cx="3474720" cy="2286000"/>
+            <a:off x="4572000" y="1691640"/>
+            <a:ext cx="3044952" cy="36576"/>
           </a:xfrm>
           <a:prstGeom prst="rect">
             <a:avLst/>
@@ -7273,10 +8348,9 @@
             <a:srgbClr val="FFFFFF"/>
           </a:solidFill>
           <a:ln>
-            <a:solidFill>
-              <a:srgbClr val="AAD4F0"/>
-            </a:solidFill>
+            <a:noFill/>
           </a:ln>
+          <a:effectLst/>
         </p:spPr>
         <p:style>
           <a:lnRef idx="1">
@@ -7302,90 +8376,14 @@
       </p:sp>
       <p:sp>
         <p:nvSpPr>
-          <p:cNvPr id="4" name="TextBox 3"/>
-          <p:cNvSpPr txBox="1"/>
-          <p:nvPr/>
-        </p:nvSpPr>
-        <p:spPr>
-          <a:xfrm>
-            <a:off x="640080" y="2194560"/>
-            <a:ext cx="2926079" cy="548640"/>
-          </a:xfrm>
-          <a:prstGeom prst="rect">
-            <a:avLst/>
-          </a:prstGeom>
-          <a:noFill/>
-        </p:spPr>
-        <p:txBody>
-          <a:bodyPr wrap="square">
-            <a:spAutoFit/>
-          </a:bodyPr>
-          <a:lstStyle/>
-          <a:p>
-            <a:pPr algn="ctr">
-              <a:defRPr sz="2200" b="1">
-                <a:solidFill>
-                  <a:srgbClr val="2B2B2B"/>
-                </a:solidFill>
-                <a:latin typeface="Calibri"/>
-              </a:defRPr>
-            </a:pPr>
-            <a:r>
-              <a:t>🔗 1. Connexion</a:t>
-            </a:r>
-          </a:p>
-        </p:txBody>
-      </p:sp>
-      <p:sp>
-        <p:nvSpPr>
-          <p:cNvPr id="5" name="TextBox 4"/>
-          <p:cNvSpPr txBox="1"/>
-          <p:nvPr/>
-        </p:nvSpPr>
-        <p:spPr>
-          <a:xfrm>
-            <a:off x="640080" y="2926080"/>
-            <a:ext cx="2926079" cy="914400"/>
-          </a:xfrm>
-          <a:prstGeom prst="rect">
-            <a:avLst/>
-          </a:prstGeom>
-          <a:noFill/>
-        </p:spPr>
-        <p:txBody>
-          <a:bodyPr wrap="square">
-            <a:spAutoFit/>
-          </a:bodyPr>
-          <a:lstStyle/>
-          <a:p>
-            <a:pPr algn="ctr">
-              <a:defRPr sz="1600" b="0">
-                <a:solidFill>
-                  <a:srgbClr val="6B6B6B"/>
-                </a:solidFill>
-                <a:latin typeface="Calibri"/>
-              </a:defRPr>
-            </a:pPr>
-            <a:r>
-              <a:t>Copilot lit vos docs</a:t>
-            </a:r>
-            <a:br/>
-            <a:r>
-              <a:t>SharePoint et OneDrive</a:t>
-            </a:r>
-          </a:p>
-        </p:txBody>
-      </p:sp>
-      <p:sp>
-        <p:nvSpPr>
-          <p:cNvPr id="6" name="Rectangle 5"/>
+          <p:cNvPr id="4" name="Rectangle 3"/>
           <p:cNvSpPr/>
           <p:nvPr/>
         </p:nvSpPr>
         <p:spPr>
           <a:xfrm>
-            <a:off x="3749040" y="2011680"/>
-            <a:ext cx="3474720" cy="2286000"/>
+            <a:off x="806957" y="2103120"/>
+            <a:ext cx="3291840" cy="2286000"/>
           </a:xfrm>
           <a:prstGeom prst="rect">
             <a:avLst/>
@@ -7395,9 +8393,10 @@
           </a:solidFill>
           <a:ln>
             <a:solidFill>
-              <a:srgbClr val="AAD4F0"/>
+              <a:srgbClr val="CCE0D2"/>
             </a:solidFill>
           </a:ln>
+          <a:effectLst/>
         </p:spPr>
         <p:style>
           <a:lnRef idx="1">
@@ -7421,6 +8420,66 @@
           </a:p>
         </p:txBody>
       </p:sp>
+      <p:pic>
+        <p:nvPicPr>
+          <p:cNvPr id="5" name="Picture 4" descr="link_006B3F_36.png"/>
+          <p:cNvPicPr>
+            <a:picLocks noChangeAspect="1"/>
+          </p:cNvPicPr>
+          <p:nvPr/>
+        </p:nvPicPr>
+        <p:blipFill>
+          <a:blip r:embed="rId3"/>
+          <a:stretch>
+            <a:fillRect/>
+          </a:stretch>
+        </p:blipFill>
+        <p:spPr>
+          <a:xfrm>
+            <a:off x="2279141" y="2176272"/>
+            <a:ext cx="347472" cy="347472"/>
+          </a:xfrm>
+          <a:prstGeom prst="rect">
+            <a:avLst/>
+          </a:prstGeom>
+        </p:spPr>
+      </p:pic>
+      <p:sp>
+        <p:nvSpPr>
+          <p:cNvPr id="6" name="TextBox 5"/>
+          <p:cNvSpPr txBox="1"/>
+          <p:nvPr/>
+        </p:nvSpPr>
+        <p:spPr>
+          <a:xfrm>
+            <a:off x="944117" y="2596896"/>
+            <a:ext cx="3017520" cy="548640"/>
+          </a:xfrm>
+          <a:prstGeom prst="rect">
+            <a:avLst/>
+          </a:prstGeom>
+          <a:noFill/>
+        </p:spPr>
+        <p:txBody>
+          <a:bodyPr wrap="square" lIns="45720" rIns="45720" tIns="18288" bIns="18288">
+            <a:spAutoFit/>
+          </a:bodyPr>
+          <a:lstStyle/>
+          <a:p>
+            <a:pPr algn="ctr">
+              <a:defRPr sz="2200" b="1">
+                <a:solidFill>
+                  <a:srgbClr val="006B3F"/>
+                </a:solidFill>
+                <a:latin typeface="Calibri"/>
+              </a:defRPr>
+            </a:pPr>
+            <a:r>
+              <a:t>1. Connexion</a:t>
+            </a:r>
+          </a:p>
+        </p:txBody>
+      </p:sp>
       <p:sp>
         <p:nvSpPr>
           <p:cNvPr id="7" name="TextBox 6"/>
@@ -7429,8 +8488,8 @@
         </p:nvSpPr>
         <p:spPr>
           <a:xfrm>
-            <a:off x="4023360" y="2194560"/>
-            <a:ext cx="2926079" cy="548640"/>
+            <a:off x="944117" y="3236976"/>
+            <a:ext cx="3017520" cy="914400"/>
           </a:xfrm>
           <a:prstGeom prst="rect">
             <a:avLst/>
@@ -7438,49 +8497,13 @@
           <a:noFill/>
         </p:spPr>
         <p:txBody>
-          <a:bodyPr wrap="square">
+          <a:bodyPr wrap="square" lIns="45720" rIns="45720" tIns="18288" bIns="18288">
             <a:spAutoFit/>
           </a:bodyPr>
           <a:lstStyle/>
           <a:p>
             <a:pPr algn="ctr">
-              <a:defRPr sz="2200" b="1">
-                <a:solidFill>
-                  <a:srgbClr val="2B2B2B"/>
-                </a:solidFill>
-                <a:latin typeface="Calibri"/>
-              </a:defRPr>
-            </a:pPr>
-            <a:r>
-              <a:t>🔐 2. Sécurité</a:t>
-            </a:r>
-          </a:p>
-        </p:txBody>
-      </p:sp>
-      <p:sp>
-        <p:nvSpPr>
-          <p:cNvPr id="8" name="TextBox 7"/>
-          <p:cNvSpPr txBox="1"/>
-          <p:nvPr/>
-        </p:nvSpPr>
-        <p:spPr>
-          <a:xfrm>
-            <a:off x="4023360" y="2926080"/>
-            <a:ext cx="2926079" cy="914400"/>
-          </a:xfrm>
-          <a:prstGeom prst="rect">
-            <a:avLst/>
-          </a:prstGeom>
-          <a:noFill/>
-        </p:spPr>
-        <p:txBody>
-          <a:bodyPr wrap="square">
-            <a:spAutoFit/>
-          </a:bodyPr>
-          <a:lstStyle/>
-          <a:p>
-            <a:pPr algn="ctr">
-              <a:defRPr sz="1600" b="0">
+              <a:defRPr sz="1500" b="0">
                 <a:solidFill>
                   <a:srgbClr val="6B6B6B"/>
                 </a:solidFill>
@@ -7488,25 +8511,25 @@
               </a:defRPr>
             </a:pPr>
             <a:r>
-              <a:t>Mêmes permissions</a:t>
+              <a:t>Copilot lit vos docs</a:t>
             </a:r>
             <a:br/>
             <a:r>
-              <a:t>que votre compte</a:t>
-            </a:r>
-          </a:p>
-        </p:txBody>
-      </p:sp>
-      <p:sp>
-        <p:nvSpPr>
-          <p:cNvPr id="9" name="Rectangle 8"/>
+              <a:t>SharePoint et OneDrive</a:t>
+            </a:r>
+          </a:p>
+        </p:txBody>
+      </p:sp>
+      <p:sp>
+        <p:nvSpPr>
+          <p:cNvPr id="8" name="Rectangle 7"/>
           <p:cNvSpPr/>
           <p:nvPr/>
         </p:nvSpPr>
         <p:spPr>
           <a:xfrm>
-            <a:off x="7132320" y="2011680"/>
-            <a:ext cx="3474720" cy="2286000"/>
+            <a:off x="4448556" y="2103120"/>
+            <a:ext cx="3291840" cy="2286000"/>
           </a:xfrm>
           <a:prstGeom prst="rect">
             <a:avLst/>
@@ -7516,9 +8539,10 @@
           </a:solidFill>
           <a:ln>
             <a:solidFill>
-              <a:srgbClr val="AAD4F0"/>
+              <a:srgbClr val="CCE0D2"/>
             </a:solidFill>
           </a:ln>
+          <a:effectLst/>
         </p:spPr>
         <p:style>
           <a:lnRef idx="1">
@@ -7542,6 +8566,30 @@
           </a:p>
         </p:txBody>
       </p:sp>
+      <p:pic>
+        <p:nvPicPr>
+          <p:cNvPr id="9" name="Picture 8" descr="lock-keyhole_006B3F_36.png"/>
+          <p:cNvPicPr>
+            <a:picLocks noChangeAspect="1"/>
+          </p:cNvPicPr>
+          <p:nvPr/>
+        </p:nvPicPr>
+        <p:blipFill>
+          <a:blip r:embed="rId4"/>
+          <a:stretch>
+            <a:fillRect/>
+          </a:stretch>
+        </p:blipFill>
+        <p:spPr>
+          <a:xfrm>
+            <a:off x="5920740" y="2176272"/>
+            <a:ext cx="347472" cy="347472"/>
+          </a:xfrm>
+          <a:prstGeom prst="rect">
+            <a:avLst/>
+          </a:prstGeom>
+        </p:spPr>
+      </p:pic>
       <p:sp>
         <p:nvSpPr>
           <p:cNvPr id="10" name="TextBox 9"/>
@@ -7550,8 +8598,8 @@
         </p:nvSpPr>
         <p:spPr>
           <a:xfrm>
-            <a:off x="7406640" y="2194560"/>
-            <a:ext cx="2926079" cy="548640"/>
+            <a:off x="4585716" y="2596896"/>
+            <a:ext cx="3017520" cy="548640"/>
           </a:xfrm>
           <a:prstGeom prst="rect">
             <a:avLst/>
@@ -7559,7 +8607,7 @@
           <a:noFill/>
         </p:spPr>
         <p:txBody>
-          <a:bodyPr wrap="square">
+          <a:bodyPr wrap="square" lIns="45720" rIns="45720" tIns="18288" bIns="18288">
             <a:spAutoFit/>
           </a:bodyPr>
           <a:lstStyle/>
@@ -7567,13 +8615,13 @@
             <a:pPr algn="ctr">
               <a:defRPr sz="2200" b="1">
                 <a:solidFill>
-                  <a:srgbClr val="2B2B2B"/>
-                </a:solidFill>
-                <a:latin typeface="Calibri"/>
-              </a:defRPr>
-            </a:pPr>
-            <a:r>
-              <a:t>💡 3. Astuce</a:t>
+                  <a:srgbClr val="006B3F"/>
+                </a:solidFill>
+                <a:latin typeface="Calibri"/>
+              </a:defRPr>
+            </a:pPr>
+            <a:r>
+              <a:t>2. Sécurité</a:t>
             </a:r>
           </a:p>
         </p:txBody>
@@ -7586,8 +8634,8 @@
         </p:nvSpPr>
         <p:spPr>
           <a:xfrm>
-            <a:off x="7406640" y="2926080"/>
-            <a:ext cx="2926079" cy="914400"/>
+            <a:off x="4585716" y="3236976"/>
+            <a:ext cx="3017520" cy="914400"/>
           </a:xfrm>
           <a:prstGeom prst="rect">
             <a:avLst/>
@@ -7595,13 +8643,13 @@
           <a:noFill/>
         </p:spPr>
         <p:txBody>
-          <a:bodyPr wrap="square">
+          <a:bodyPr wrap="square" lIns="45720" rIns="45720" tIns="18288" bIns="18288">
             <a:spAutoFit/>
           </a:bodyPr>
           <a:lstStyle/>
           <a:p>
             <a:pPr algn="ctr">
-              <a:defRPr sz="1600" b="0">
+              <a:defRPr sz="1500" b="0">
                 <a:solidFill>
                   <a:srgbClr val="6B6B6B"/>
                 </a:solidFill>
@@ -7609,11 +8657,11 @@
               </a:defRPr>
             </a:pPr>
             <a:r>
-              <a:t>Mentionnez le site</a:t>
+              <a:t>Mêmes permissions</a:t>
             </a:r>
             <a:br/>
             <a:r>
-              <a:t>ou fichier dans le prompt</a:t>
+              <a:t>que votre compte</a:t>
             </a:r>
           </a:p>
         </p:txBody>
@@ -7626,20 +8674,21 @@
         </p:nvSpPr>
         <p:spPr>
           <a:xfrm>
-            <a:off x="3200400" y="4754880"/>
-            <a:ext cx="5760720" cy="1097280"/>
+            <a:off x="8090154" y="2103120"/>
+            <a:ext cx="3291840" cy="2286000"/>
           </a:xfrm>
           <a:prstGeom prst="rect">
             <a:avLst/>
           </a:prstGeom>
           <a:solidFill>
-            <a:srgbClr val="FFF3CD"/>
+            <a:srgbClr val="FFFFFF"/>
           </a:solidFill>
           <a:ln>
             <a:solidFill>
-              <a:srgbClr val="FFE082"/>
+              <a:srgbClr val="CCE0D2"/>
             </a:solidFill>
           </a:ln>
+          <a:effectLst/>
         </p:spPr>
         <p:style>
           <a:lnRef idx="1">
@@ -7663,42 +8712,30 @@
           </a:p>
         </p:txBody>
       </p:sp>
-      <p:sp>
-        <p:nvSpPr>
-          <p:cNvPr id="13" name="TextBox 12"/>
-          <p:cNvSpPr txBox="1"/>
+      <p:pic>
+        <p:nvPicPr>
+          <p:cNvPr id="13" name="Picture 12" descr="lightbulb_006B3F_36.png"/>
+          <p:cNvPicPr>
+            <a:picLocks noChangeAspect="1"/>
+          </p:cNvPicPr>
           <p:nvPr/>
-        </p:nvSpPr>
-        <p:spPr>
-          <a:xfrm>
-            <a:off x="3383280" y="4937760"/>
-            <a:ext cx="5394960" cy="548640"/>
-          </a:xfrm>
-          <a:prstGeom prst="rect">
-            <a:avLst/>
-          </a:prstGeom>
-          <a:noFill/>
-        </p:spPr>
-        <p:txBody>
-          <a:bodyPr wrap="square">
-            <a:spAutoFit/>
-          </a:bodyPr>
-          <a:lstStyle/>
-          <a:p>
-            <a:pPr algn="ctr">
-              <a:defRPr sz="1600" b="1">
-                <a:solidFill>
-                  <a:srgbClr val="856E04"/>
-                </a:solidFill>
-                <a:latin typeface="Calibri"/>
-              </a:defRPr>
-            </a:pPr>
-            <a:r>
-              <a:t>🎯 Défi: Essayez «Trouve le document X sur SharePoint et résume-le» cette semaine!</a:t>
-            </a:r>
-          </a:p>
-        </p:txBody>
-      </p:sp>
+        </p:nvPicPr>
+        <p:blipFill>
+          <a:blip r:embed="rId5"/>
+          <a:stretch>
+            <a:fillRect/>
+          </a:stretch>
+        </p:blipFill>
+        <p:spPr>
+          <a:xfrm>
+            <a:off x="9562338" y="2176272"/>
+            <a:ext cx="347472" cy="347472"/>
+          </a:xfrm>
+          <a:prstGeom prst="rect">
+            <a:avLst/>
+          </a:prstGeom>
+        </p:spPr>
+      </p:pic>
       <p:sp>
         <p:nvSpPr>
           <p:cNvPr id="14" name="TextBox 13"/>
@@ -7707,8 +8744,8 @@
         </p:nvSpPr>
         <p:spPr>
           <a:xfrm>
-            <a:off x="914400" y="6126480"/>
-            <a:ext cx="10058400" cy="457200"/>
+            <a:off x="8227314" y="2596896"/>
+            <a:ext cx="3017520" cy="548640"/>
           </a:xfrm>
           <a:prstGeom prst="rect">
             <a:avLst/>
@@ -7716,21 +8753,223 @@
           <a:noFill/>
         </p:spPr>
         <p:txBody>
-          <a:bodyPr wrap="square">
+          <a:bodyPr wrap="square" lIns="45720" rIns="45720" tIns="18288" bIns="18288">
             <a:spAutoFit/>
           </a:bodyPr>
           <a:lstStyle/>
           <a:p>
             <a:pPr algn="ctr">
-              <a:defRPr sz="1400" b="0">
-                <a:solidFill>
-                  <a:srgbClr val="AAD4F0"/>
-                </a:solidFill>
-                <a:latin typeface="Calibri"/>
-              </a:defRPr>
-            </a:pPr>
-            <a:r>
-              <a:t>La minute Copilot — À la semaine prochaine! 👋</a:t>
+              <a:defRPr sz="2200" b="1">
+                <a:solidFill>
+                  <a:srgbClr val="006B3F"/>
+                </a:solidFill>
+                <a:latin typeface="Calibri"/>
+              </a:defRPr>
+            </a:pPr>
+            <a:r>
+              <a:t>3. Astuce</a:t>
+            </a:r>
+          </a:p>
+        </p:txBody>
+      </p:sp>
+      <p:sp>
+        <p:nvSpPr>
+          <p:cNvPr id="15" name="TextBox 14"/>
+          <p:cNvSpPr txBox="1"/>
+          <p:nvPr/>
+        </p:nvSpPr>
+        <p:spPr>
+          <a:xfrm>
+            <a:off x="8227314" y="3236976"/>
+            <a:ext cx="3017520" cy="914400"/>
+          </a:xfrm>
+          <a:prstGeom prst="rect">
+            <a:avLst/>
+          </a:prstGeom>
+          <a:noFill/>
+        </p:spPr>
+        <p:txBody>
+          <a:bodyPr wrap="square" lIns="45720" rIns="45720" tIns="18288" bIns="18288">
+            <a:spAutoFit/>
+          </a:bodyPr>
+          <a:lstStyle/>
+          <a:p>
+            <a:pPr algn="ctr">
+              <a:defRPr sz="1500" b="0">
+                <a:solidFill>
+                  <a:srgbClr val="6B6B6B"/>
+                </a:solidFill>
+                <a:latin typeface="Calibri"/>
+              </a:defRPr>
+            </a:pPr>
+            <a:r>
+              <a:t>Mentionnez le site</a:t>
+            </a:r>
+            <a:br/>
+            <a:r>
+              <a:t>ou fichier dans le prompt</a:t>
+            </a:r>
+          </a:p>
+        </p:txBody>
+      </p:sp>
+      <p:sp>
+        <p:nvSpPr>
+          <p:cNvPr id="16" name="Rectangle 15"/>
+          <p:cNvSpPr/>
+          <p:nvPr/>
+        </p:nvSpPr>
+        <p:spPr>
+          <a:xfrm>
+            <a:off x="2423160" y="4681728"/>
+            <a:ext cx="7342631" cy="1078992"/>
+          </a:xfrm>
+          <a:prstGeom prst="rect">
+            <a:avLst/>
+          </a:prstGeom>
+          <a:solidFill>
+            <a:srgbClr val="FFFFFF"/>
+          </a:solidFill>
+          <a:ln>
+            <a:solidFill>
+              <a:srgbClr val="CCE0D2"/>
+            </a:solidFill>
+          </a:ln>
+          <a:effectLst/>
+        </p:spPr>
+        <p:style>
+          <a:lnRef idx="1">
+            <a:schemeClr val="accent1"/>
+          </a:lnRef>
+          <a:fillRef idx="3">
+            <a:schemeClr val="accent1"/>
+          </a:fillRef>
+          <a:effectRef idx="2">
+            <a:schemeClr val="accent1"/>
+          </a:effectRef>
+          <a:fontRef idx="minor">
+            <a:schemeClr val="lt1"/>
+          </a:fontRef>
+        </p:style>
+        <p:txBody>
+          <a:bodyPr rtlCol="0" anchor="ctr"/>
+          <a:lstStyle/>
+          <a:p>
+            <a:pPr algn="ctr"/>
+          </a:p>
+        </p:txBody>
+      </p:sp>
+      <p:sp>
+        <p:nvSpPr>
+          <p:cNvPr id="17" name="Rectangle 16"/>
+          <p:cNvSpPr/>
+          <p:nvPr/>
+        </p:nvSpPr>
+        <p:spPr>
+          <a:xfrm>
+            <a:off x="2423160" y="4681728"/>
+            <a:ext cx="64008" cy="1078992"/>
+          </a:xfrm>
+          <a:prstGeom prst="rect">
+            <a:avLst/>
+          </a:prstGeom>
+          <a:solidFill>
+            <a:srgbClr val="00874E"/>
+          </a:solidFill>
+          <a:ln>
+            <a:noFill/>
+          </a:ln>
+          <a:effectLst/>
+        </p:spPr>
+        <p:style>
+          <a:lnRef idx="1">
+            <a:schemeClr val="accent1"/>
+          </a:lnRef>
+          <a:fillRef idx="3">
+            <a:schemeClr val="accent1"/>
+          </a:fillRef>
+          <a:effectRef idx="2">
+            <a:schemeClr val="accent1"/>
+          </a:effectRef>
+          <a:fontRef idx="minor">
+            <a:schemeClr val="lt1"/>
+          </a:fontRef>
+        </p:style>
+        <p:txBody>
+          <a:bodyPr rtlCol="0" anchor="ctr"/>
+          <a:lstStyle/>
+          <a:p>
+            <a:pPr algn="ctr"/>
+          </a:p>
+        </p:txBody>
+      </p:sp>
+      <p:sp>
+        <p:nvSpPr>
+          <p:cNvPr id="18" name="TextBox 17"/>
+          <p:cNvSpPr txBox="1"/>
+          <p:nvPr/>
+        </p:nvSpPr>
+        <p:spPr>
+          <a:xfrm>
+            <a:off x="2587752" y="4937760"/>
+            <a:ext cx="7013447" cy="713231"/>
+          </a:xfrm>
+          <a:prstGeom prst="rect">
+            <a:avLst/>
+          </a:prstGeom>
+          <a:noFill/>
+        </p:spPr>
+        <p:txBody>
+          <a:bodyPr wrap="square" lIns="45720" rIns="45720" tIns="18288" bIns="18288">
+            <a:spAutoFit/>
+          </a:bodyPr>
+          <a:lstStyle/>
+          <a:p>
+            <a:pPr algn="ctr">
+              <a:defRPr sz="1500" b="1">
+                <a:solidFill>
+                  <a:srgbClr val="006B3F"/>
+                </a:solidFill>
+                <a:latin typeface="Calibri"/>
+              </a:defRPr>
+            </a:pPr>
+            <a:r>
+              <a:t>Défi: Essayez «Trouve le document X sur SharePoint et résume-le» cette semaine!</a:t>
+            </a:r>
+          </a:p>
+        </p:txBody>
+      </p:sp>
+      <p:sp>
+        <p:nvSpPr>
+          <p:cNvPr id="19" name="TextBox 18"/>
+          <p:cNvSpPr txBox="1"/>
+          <p:nvPr/>
+        </p:nvSpPr>
+        <p:spPr>
+          <a:xfrm>
+            <a:off x="914400" y="5989320"/>
+            <a:ext cx="10360152" cy="365760"/>
+          </a:xfrm>
+          <a:prstGeom prst="rect">
+            <a:avLst/>
+          </a:prstGeom>
+          <a:noFill/>
+        </p:spPr>
+        <p:txBody>
+          <a:bodyPr wrap="square" lIns="45720" rIns="45720" tIns="18288" bIns="18288">
+            <a:spAutoFit/>
+          </a:bodyPr>
+          <a:lstStyle/>
+          <a:p>
+            <a:pPr algn="ctr">
+              <a:defRPr sz="1300" b="0">
+                <a:solidFill>
+                  <a:srgbClr val="CCE0D2"/>
+                </a:solidFill>
+                <a:latin typeface="Calibri"/>
+              </a:defRPr>
+            </a:pPr>
+            <a:r>
+              <a:t>La minute Copilot — À la semaine prochaine!</a:t>
             </a:r>
           </a:p>
         </p:txBody>
